--- a/slides/03_Dia_3_Kubernetes_Helm.pptx
+++ b/slides/03_Dia_3_Kubernetes_Helm.pptx
@@ -2014,7 +2014,7 @@
     <p:bg>
       <p:bgPr>
         <a:solidFill>
-          <a:srgbClr val="0B1B2B"/>
+          <a:srgbClr val="0A1622"/>
         </a:solidFill>
       </p:bgPr>
     </p:bg>
@@ -2052,6 +2052,13 @@
             <a:srgbClr val="22D3EE"/>
           </a:solidFill>
           <a:ln/>
+          <a:effectLst>
+            <a:outerShdw sx="100000" sy="100000" kx="0" ky="0" algn="bl" rotWithShape="0" blurRad="50800" dist="25400" dir="5400000">
+              <a:srgbClr val="000000">
+                <a:alpha val="40000"/>
+              </a:srgbClr>
+            </a:outerShdw>
+          </a:effectLst>
         </p:spPr>
       </p:sp>
       <p:sp>
@@ -2199,7 +2206,27 @@
       </p:sp>
       <p:sp>
         <p:nvSpPr>
-          <p:cNvPr id="7" name="Text 5"/>
+          <p:cNvPr id="7" name="Shape 5"/>
+          <p:cNvSpPr/>
+          <p:nvPr/>
+        </p:nvSpPr>
+        <p:spPr>
+          <a:xfrm>
+            <a:off x="566928" y="3154680"/>
+            <a:ext cx="1280160" cy="36576"/>
+          </a:xfrm>
+          <a:prstGeom prst="rect">
+            <a:avLst/>
+          </a:prstGeom>
+          <a:solidFill>
+            <a:srgbClr val="22D3EE"/>
+          </a:solidFill>
+          <a:ln/>
+        </p:spPr>
+      </p:sp>
+      <p:sp>
+        <p:nvSpPr>
+          <p:cNvPr id="8" name="Text 6"/>
           <p:cNvSpPr/>
           <p:nvPr/>
         </p:nvSpPr>
@@ -2224,7 +2251,7 @@
             <a:r>
               <a:rPr lang="en-US" sz="1700" dirty="0">
                 <a:solidFill>
-                  <a:srgbClr val="A8B4C4"/>
+                  <a:srgbClr val="9FB0C2"/>
                 </a:solidFill>
                 <a:latin typeface="Calibri" pitchFamily="34" charset="0"/>
                 <a:ea typeface="Calibri" pitchFamily="34" charset="-122"/>
@@ -2238,7 +2265,7 @@
       </p:sp>
       <p:sp>
         <p:nvSpPr>
-          <p:cNvPr id="8" name="Shape 6"/>
+          <p:cNvPr id="9" name="Shape 7"/>
           <p:cNvSpPr/>
           <p:nvPr/>
         </p:nvSpPr>
@@ -2251,14 +2278,14 @@
             <a:avLst/>
           </a:prstGeom>
           <a:solidFill>
-            <a:srgbClr val="284963"/>
-          </a:solidFill>
-          <a:ln/>
-        </p:spPr>
-      </p:sp>
-      <p:sp>
-        <p:nvSpPr>
-          <p:cNvPr id="9" name="Text 7"/>
+            <a:srgbClr val="264862"/>
+          </a:solidFill>
+          <a:ln/>
+        </p:spPr>
+      </p:sp>
+      <p:sp>
+        <p:nvSpPr>
+          <p:cNvPr id="10" name="Text 8"/>
           <p:cNvSpPr/>
           <p:nvPr/>
         </p:nvSpPr>
@@ -2283,7 +2310,7 @@
             <a:r>
               <a:rPr lang="en-US" sz="1200" dirty="0">
                 <a:solidFill>
-                  <a:srgbClr val="A8B4C4"/>
+                  <a:srgbClr val="9FB0C2"/>
                 </a:solidFill>
                 <a:latin typeface="Consolas" pitchFamily="34" charset="0"/>
                 <a:ea typeface="Consolas" pitchFamily="34" charset="-122"/>
@@ -2309,7 +2336,7 @@
     <p:bg>
       <p:bgPr>
         <a:solidFill>
-          <a:srgbClr val="0B1B2B"/>
+          <a:srgbClr val="0A1622"/>
         </a:solidFill>
       </p:bgPr>
     </p:bg>
@@ -2347,6 +2374,13 @@
             <a:srgbClr val="22D3EE"/>
           </a:solidFill>
           <a:ln/>
+          <a:effectLst>
+            <a:outerShdw sx="100000" sy="100000" kx="0" ky="0" algn="bl" rotWithShape="0" blurRad="50800" dist="25400" dir="5400000">
+              <a:srgbClr val="000000">
+                <a:alpha val="40000"/>
+              </a:srgbClr>
+            </a:outerShdw>
+          </a:effectLst>
         </p:spPr>
       </p:sp>
       <p:sp>
@@ -2376,7 +2410,7 @@
             <a:r>
               <a:rPr lang="en-US" sz="2200" b="1" dirty="0">
                 <a:solidFill>
-                  <a:srgbClr val="0B1B2B"/>
+                  <a:srgbClr val="0A1622"/>
                 </a:solidFill>
                 <a:latin typeface="Consolas" pitchFamily="34" charset="0"/>
                 <a:ea typeface="Consolas" pitchFamily="34" charset="-122"/>
@@ -2474,14 +2508,36 @@
         </p:nvSpPr>
         <p:spPr>
           <a:xfrm>
+            <a:off x="1298448" y="1316736"/>
+            <a:ext cx="1005840" cy="32004"/>
+          </a:xfrm>
+          <a:prstGeom prst="rect">
+            <a:avLst/>
+          </a:prstGeom>
+          <a:solidFill>
+            <a:srgbClr val="22D3EE"/>
+          </a:solidFill>
+          <a:ln/>
+        </p:spPr>
+      </p:sp>
+      <p:sp>
+        <p:nvSpPr>
+          <p:cNvPr id="7" name="Shape 5"/>
+          <p:cNvSpPr/>
+          <p:nvPr/>
+        </p:nvSpPr>
+        <p:spPr>
+          <a:xfrm>
             <a:off x="548640" y="1920240"/>
             <a:ext cx="8046720" cy="1554480"/>
           </a:xfrm>
-          <a:prstGeom prst="rect">
-            <a:avLst/>
-          </a:prstGeom>
-          <a:solidFill>
-            <a:srgbClr val="12293D"/>
+          <a:prstGeom prst="roundRect">
+            <a:avLst>
+              <a:gd name="adj" fmla="val 2941"/>
+            </a:avLst>
+          </a:prstGeom>
+          <a:solidFill>
+            <a:srgbClr val="13283C"/>
           </a:solidFill>
           <a:ln w="19050">
             <a:solidFill>
@@ -2489,18 +2545,25 @@
             </a:solidFill>
             <a:prstDash val="solid"/>
           </a:ln>
-        </p:spPr>
-      </p:sp>
-      <p:sp>
-        <p:nvSpPr>
-          <p:cNvPr id="7" name="Shape 5"/>
-          <p:cNvSpPr/>
-          <p:nvPr/>
-        </p:nvSpPr>
-        <p:spPr>
-          <a:xfrm>
-            <a:off x="548640" y="1920240"/>
-            <a:ext cx="91440" cy="1554480"/>
+          <a:effectLst>
+            <a:outerShdw sx="100000" sy="100000" kx="0" ky="0" algn="bl" rotWithShape="0" blurRad="88900" dist="38100" dir="5400000">
+              <a:srgbClr val="000000">
+                <a:alpha val="50000"/>
+              </a:srgbClr>
+            </a:outerShdw>
+          </a:effectLst>
+        </p:spPr>
+      </p:sp>
+      <p:sp>
+        <p:nvSpPr>
+          <p:cNvPr id="8" name="Shape 6"/>
+          <p:cNvSpPr/>
+          <p:nvPr/>
+        </p:nvSpPr>
+        <p:spPr>
+          <a:xfrm>
+            <a:off x="562356" y="1993392"/>
+            <a:ext cx="91440" cy="1408176"/>
           </a:xfrm>
           <a:prstGeom prst="rect">
             <a:avLst/>
@@ -2513,13 +2576,13 @@
       </p:sp>
       <p:sp>
         <p:nvSpPr>
-          <p:cNvPr id="8" name="Text 6"/>
-          <p:cNvSpPr/>
-          <p:nvPr/>
-        </p:nvSpPr>
-        <p:spPr>
-          <a:xfrm>
-            <a:off x="868680" y="2121408"/>
+          <p:cNvPr id="9" name="Text 7"/>
+          <p:cNvSpPr/>
+          <p:nvPr/>
+        </p:nvSpPr>
+        <p:spPr>
+          <a:xfrm>
+            <a:off x="896112" y="2121408"/>
             <a:ext cx="7498080" cy="777240"/>
           </a:xfrm>
           <a:prstGeom prst="rect">
@@ -2552,13 +2615,13 @@
       </p:sp>
       <p:sp>
         <p:nvSpPr>
-          <p:cNvPr id="9" name="Text 7"/>
-          <p:cNvSpPr/>
-          <p:nvPr/>
-        </p:nvSpPr>
-        <p:spPr>
-          <a:xfrm>
-            <a:off x="868680" y="2834640"/>
+          <p:cNvPr id="10" name="Text 8"/>
+          <p:cNvSpPr/>
+          <p:nvPr/>
+        </p:nvSpPr>
+        <p:spPr>
+          <a:xfrm>
+            <a:off x="896112" y="2834640"/>
             <a:ext cx="7498080" cy="548640"/>
           </a:xfrm>
           <a:prstGeom prst="rect">
@@ -2577,7 +2640,7 @@
             <a:r>
               <a:rPr lang="en-US" sz="1500" dirty="0">
                 <a:solidFill>
-                  <a:srgbClr val="E8EEF5"/>
+                  <a:srgbClr val="EAF1F8"/>
                 </a:solidFill>
                 <a:latin typeface="Calibri" pitchFamily="34" charset="0"/>
                 <a:ea typeface="Calibri" pitchFamily="34" charset="-122"/>
@@ -2603,7 +2666,7 @@
     <p:bg>
       <p:bgPr>
         <a:solidFill>
-          <a:srgbClr val="0B1B2B"/>
+          <a:srgbClr val="0A1622"/>
         </a:solidFill>
       </p:bgPr>
     </p:bg>
@@ -2641,6 +2704,13 @@
             <a:srgbClr val="22D3EE"/>
           </a:solidFill>
           <a:ln/>
+          <a:effectLst>
+            <a:outerShdw sx="100000" sy="100000" kx="0" ky="0" algn="bl" rotWithShape="0" blurRad="50800" dist="25400" dir="5400000">
+              <a:srgbClr val="000000">
+                <a:alpha val="40000"/>
+              </a:srgbClr>
+            </a:outerShdw>
+          </a:effectLst>
         </p:spPr>
       </p:sp>
       <p:sp>
@@ -2670,7 +2740,7 @@
             <a:r>
               <a:rPr lang="en-US" sz="2200" b="1" dirty="0">
                 <a:solidFill>
-                  <a:srgbClr val="0B1B2B"/>
+                  <a:srgbClr val="0A1622"/>
                 </a:solidFill>
                 <a:latin typeface="Consolas" pitchFamily="34" charset="0"/>
                 <a:ea typeface="Consolas" pitchFamily="34" charset="-122"/>
@@ -2768,53 +2838,82 @@
         </p:nvSpPr>
         <p:spPr>
           <a:xfrm>
+            <a:off x="1298448" y="1316736"/>
+            <a:ext cx="1005840" cy="32004"/>
+          </a:xfrm>
+          <a:prstGeom prst="rect">
+            <a:avLst/>
+          </a:prstGeom>
+          <a:solidFill>
+            <a:srgbClr val="22D3EE"/>
+          </a:solidFill>
+          <a:ln/>
+        </p:spPr>
+      </p:sp>
+      <p:sp>
+        <p:nvSpPr>
+          <p:cNvPr id="7" name="Shape 5"/>
+          <p:cNvSpPr/>
+          <p:nvPr/>
+        </p:nvSpPr>
+        <p:spPr>
+          <a:xfrm>
             <a:off x="548640" y="1691640"/>
             <a:ext cx="3886200" cy="2743200"/>
           </a:xfrm>
-          <a:prstGeom prst="rect">
-            <a:avLst/>
-          </a:prstGeom>
-          <a:solidFill>
-            <a:srgbClr val="12293D"/>
+          <a:prstGeom prst="roundRect">
+            <a:avLst>
+              <a:gd name="adj" fmla="val 1667"/>
+            </a:avLst>
+          </a:prstGeom>
+          <a:solidFill>
+            <a:srgbClr val="13283C"/>
           </a:solidFill>
           <a:ln w="15875">
             <a:solidFill>
-              <a:srgbClr val="A8B4C4"/>
+              <a:srgbClr val="9FB0C2"/>
             </a:solidFill>
             <a:prstDash val="solid"/>
           </a:ln>
-        </p:spPr>
-      </p:sp>
-      <p:sp>
-        <p:nvSpPr>
-          <p:cNvPr id="7" name="Shape 5"/>
-          <p:cNvSpPr/>
-          <p:nvPr/>
-        </p:nvSpPr>
-        <p:spPr>
-          <a:xfrm>
-            <a:off x="548640" y="1691640"/>
-            <a:ext cx="82296" cy="2743200"/>
-          </a:xfrm>
-          <a:prstGeom prst="rect">
-            <a:avLst/>
-          </a:prstGeom>
-          <a:solidFill>
-            <a:srgbClr val="A8B4C4"/>
-          </a:solidFill>
-          <a:ln/>
-        </p:spPr>
-      </p:sp>
-      <p:sp>
-        <p:nvSpPr>
-          <p:cNvPr id="8" name="Text 6"/>
-          <p:cNvSpPr/>
-          <p:nvPr/>
-        </p:nvSpPr>
-        <p:spPr>
-          <a:xfrm>
-            <a:off x="786384" y="1837944"/>
-            <a:ext cx="3502152" cy="384048"/>
+          <a:effectLst>
+            <a:outerShdw sx="100000" sy="100000" kx="0" ky="0" algn="bl" rotWithShape="0" blurRad="88900" dist="38100" dir="5400000">
+              <a:srgbClr val="000000">
+                <a:alpha val="50000"/>
+              </a:srgbClr>
+            </a:outerShdw>
+          </a:effectLst>
+        </p:spPr>
+      </p:sp>
+      <p:sp>
+        <p:nvSpPr>
+          <p:cNvPr id="8" name="Shape 6"/>
+          <p:cNvSpPr/>
+          <p:nvPr/>
+        </p:nvSpPr>
+        <p:spPr>
+          <a:xfrm>
+            <a:off x="562356" y="1764792"/>
+            <a:ext cx="73152" cy="2596896"/>
+          </a:xfrm>
+          <a:prstGeom prst="rect">
+            <a:avLst/>
+          </a:prstGeom>
+          <a:solidFill>
+            <a:srgbClr val="9FB0C2"/>
+          </a:solidFill>
+          <a:ln/>
+        </p:spPr>
+      </p:sp>
+      <p:sp>
+        <p:nvSpPr>
+          <p:cNvPr id="9" name="Text 7"/>
+          <p:cNvSpPr/>
+          <p:nvPr/>
+        </p:nvSpPr>
+        <p:spPr>
+          <a:xfrm>
+            <a:off x="804672" y="1828800"/>
+            <a:ext cx="3483864" cy="384048"/>
           </a:xfrm>
           <a:prstGeom prst="rect">
             <a:avLst/>
@@ -2830,9 +2929,9 @@
               <a:buNone/>
             </a:pPr>
             <a:r>
-              <a:rPr lang="en-US" sz="1500" b="1" dirty="0">
-                <a:solidFill>
-                  <a:srgbClr val="A8B4C4"/>
+              <a:rPr lang="en-US" sz="1500" b="1" spc="50" kern="0" dirty="0">
+                <a:solidFill>
+                  <a:srgbClr val="9FB0C2"/>
                 </a:solidFill>
                 <a:latin typeface="Trebuchet MS" pitchFamily="34" charset="0"/>
                 <a:ea typeface="Trebuchet MS" pitchFamily="34" charset="-122"/>
@@ -2846,14 +2945,34 @@
       </p:sp>
       <p:sp>
         <p:nvSpPr>
-          <p:cNvPr id="9" name="Text 7"/>
-          <p:cNvSpPr/>
-          <p:nvPr/>
-        </p:nvSpPr>
-        <p:spPr>
-          <a:xfrm>
-            <a:off x="786384" y="2276856"/>
-            <a:ext cx="3429000" cy="2011680"/>
+          <p:cNvPr id="10" name="Shape 8"/>
+          <p:cNvSpPr/>
+          <p:nvPr/>
+        </p:nvSpPr>
+        <p:spPr>
+          <a:xfrm>
+            <a:off x="804672" y="2221992"/>
+            <a:ext cx="3374136" cy="16459"/>
+          </a:xfrm>
+          <a:prstGeom prst="rect">
+            <a:avLst/>
+          </a:prstGeom>
+          <a:solidFill>
+            <a:srgbClr val="264862"/>
+          </a:solidFill>
+          <a:ln/>
+        </p:spPr>
+      </p:sp>
+      <p:sp>
+        <p:nvSpPr>
+          <p:cNvPr id="11" name="Text 9"/>
+          <p:cNvSpPr/>
+          <p:nvPr/>
+        </p:nvSpPr>
+        <p:spPr>
+          <a:xfrm>
+            <a:off x="804672" y="2331720"/>
+            <a:ext cx="3410712" cy="1956816"/>
           </a:xfrm>
           <a:prstGeom prst="rect">
             <a:avLst/>
@@ -2875,7 +2994,7 @@
             <a:r>
               <a:rPr lang="en-US" sz="1250" dirty="0">
                 <a:solidFill>
-                  <a:srgbClr val="E8EEF5"/>
+                  <a:srgbClr val="EAF1F8"/>
                 </a:solidFill>
                 <a:latin typeface="Calibri" pitchFamily="34" charset="0"/>
                 <a:ea typeface="Calibri" pitchFamily="34" charset="-122"/>
@@ -2896,7 +3015,7 @@
             <a:r>
               <a:rPr lang="en-US" sz="1250" dirty="0">
                 <a:solidFill>
-                  <a:srgbClr val="E8EEF5"/>
+                  <a:srgbClr val="EAF1F8"/>
                 </a:solidFill>
                 <a:latin typeface="Calibri" pitchFamily="34" charset="0"/>
                 <a:ea typeface="Calibri" pitchFamily="34" charset="-122"/>
@@ -2917,7 +3036,7 @@
             <a:r>
               <a:rPr lang="en-US" sz="1250" dirty="0">
                 <a:solidFill>
-                  <a:srgbClr val="E8EEF5"/>
+                  <a:srgbClr val="EAF1F8"/>
                 </a:solidFill>
                 <a:latin typeface="Calibri" pitchFamily="34" charset="0"/>
                 <a:ea typeface="Calibri" pitchFamily="34" charset="-122"/>
@@ -2938,7 +3057,7 @@
             <a:r>
               <a:rPr lang="en-US" sz="1250" dirty="0">
                 <a:solidFill>
-                  <a:srgbClr val="E8EEF5"/>
+                  <a:srgbClr val="EAF1F8"/>
                 </a:solidFill>
                 <a:latin typeface="Calibri" pitchFamily="34" charset="0"/>
                 <a:ea typeface="Calibri" pitchFamily="34" charset="-122"/>
@@ -2952,7 +3071,7 @@
       </p:sp>
       <p:sp>
         <p:nvSpPr>
-          <p:cNvPr id="10" name="Shape 8"/>
+          <p:cNvPr id="12" name="Shape 10"/>
           <p:cNvSpPr/>
           <p:nvPr/>
         </p:nvSpPr>
@@ -2961,11 +3080,13 @@
             <a:off x="4663440" y="1691640"/>
             <a:ext cx="3931920" cy="2743200"/>
           </a:xfrm>
-          <a:prstGeom prst="rect">
-            <a:avLst/>
-          </a:prstGeom>
-          <a:solidFill>
-            <a:srgbClr val="12293D"/>
+          <a:prstGeom prst="roundRect">
+            <a:avLst>
+              <a:gd name="adj" fmla="val 1667"/>
+            </a:avLst>
+          </a:prstGeom>
+          <a:solidFill>
+            <a:srgbClr val="13283C"/>
           </a:solidFill>
           <a:ln w="15875">
             <a:solidFill>
@@ -2973,18 +3094,25 @@
             </a:solidFill>
             <a:prstDash val="solid"/>
           </a:ln>
-        </p:spPr>
-      </p:sp>
-      <p:sp>
-        <p:nvSpPr>
-          <p:cNvPr id="11" name="Shape 9"/>
-          <p:cNvSpPr/>
-          <p:nvPr/>
-        </p:nvSpPr>
-        <p:spPr>
-          <a:xfrm>
-            <a:off x="4663440" y="1691640"/>
-            <a:ext cx="82296" cy="2743200"/>
+          <a:effectLst>
+            <a:outerShdw sx="100000" sy="100000" kx="0" ky="0" algn="bl" rotWithShape="0" blurRad="88900" dist="38100" dir="5400000">
+              <a:srgbClr val="000000">
+                <a:alpha val="50000"/>
+              </a:srgbClr>
+            </a:outerShdw>
+          </a:effectLst>
+        </p:spPr>
+      </p:sp>
+      <p:sp>
+        <p:nvSpPr>
+          <p:cNvPr id="13" name="Shape 11"/>
+          <p:cNvSpPr/>
+          <p:nvPr/>
+        </p:nvSpPr>
+        <p:spPr>
+          <a:xfrm>
+            <a:off x="4677156" y="1764792"/>
+            <a:ext cx="73152" cy="2596896"/>
           </a:xfrm>
           <a:prstGeom prst="rect">
             <a:avLst/>
@@ -2997,14 +3125,14 @@
       </p:sp>
       <p:sp>
         <p:nvSpPr>
-          <p:cNvPr id="12" name="Text 10"/>
-          <p:cNvSpPr/>
-          <p:nvPr/>
-        </p:nvSpPr>
-        <p:spPr>
-          <a:xfrm>
-            <a:off x="4901184" y="1837944"/>
-            <a:ext cx="3547872" cy="384048"/>
+          <p:cNvPr id="14" name="Text 12"/>
+          <p:cNvSpPr/>
+          <p:nvPr/>
+        </p:nvSpPr>
+        <p:spPr>
+          <a:xfrm>
+            <a:off x="4919472" y="1828800"/>
+            <a:ext cx="3529584" cy="384048"/>
           </a:xfrm>
           <a:prstGeom prst="rect">
             <a:avLst/>
@@ -3020,7 +3148,7 @@
               <a:buNone/>
             </a:pPr>
             <a:r>
-              <a:rPr lang="en-US" sz="1500" b="1" dirty="0">
+              <a:rPr lang="en-US" sz="1500" b="1" spc="50" kern="0" dirty="0">
                 <a:solidFill>
                   <a:srgbClr val="34D399"/>
                 </a:solidFill>
@@ -3036,14 +3164,34 @@
       </p:sp>
       <p:sp>
         <p:nvSpPr>
-          <p:cNvPr id="13" name="Text 11"/>
-          <p:cNvSpPr/>
-          <p:nvPr/>
-        </p:nvSpPr>
-        <p:spPr>
-          <a:xfrm>
-            <a:off x="4901184" y="2276856"/>
-            <a:ext cx="3474720" cy="2011680"/>
+          <p:cNvPr id="15" name="Shape 13"/>
+          <p:cNvSpPr/>
+          <p:nvPr/>
+        </p:nvSpPr>
+        <p:spPr>
+          <a:xfrm>
+            <a:off x="4919472" y="2221992"/>
+            <a:ext cx="3419856" cy="16459"/>
+          </a:xfrm>
+          <a:prstGeom prst="rect">
+            <a:avLst/>
+          </a:prstGeom>
+          <a:solidFill>
+            <a:srgbClr val="264862"/>
+          </a:solidFill>
+          <a:ln/>
+        </p:spPr>
+      </p:sp>
+      <p:sp>
+        <p:nvSpPr>
+          <p:cNvPr id="16" name="Text 14"/>
+          <p:cNvSpPr/>
+          <p:nvPr/>
+        </p:nvSpPr>
+        <p:spPr>
+          <a:xfrm>
+            <a:off x="4919472" y="2331720"/>
+            <a:ext cx="3456432" cy="1956816"/>
           </a:xfrm>
           <a:prstGeom prst="rect">
             <a:avLst/>
@@ -3065,7 +3213,7 @@
             <a:r>
               <a:rPr lang="en-US" sz="1250" dirty="0">
                 <a:solidFill>
-                  <a:srgbClr val="E8EEF5"/>
+                  <a:srgbClr val="EAF1F8"/>
                 </a:solidFill>
                 <a:latin typeface="Calibri" pitchFamily="34" charset="0"/>
                 <a:ea typeface="Calibri" pitchFamily="34" charset="-122"/>
@@ -3086,7 +3234,7 @@
             <a:r>
               <a:rPr lang="en-US" sz="1250" dirty="0">
                 <a:solidFill>
-                  <a:srgbClr val="E8EEF5"/>
+                  <a:srgbClr val="EAF1F8"/>
                 </a:solidFill>
                 <a:latin typeface="Calibri" pitchFamily="34" charset="0"/>
                 <a:ea typeface="Calibri" pitchFamily="34" charset="-122"/>
@@ -3107,7 +3255,7 @@
             <a:r>
               <a:rPr lang="en-US" sz="1250" dirty="0">
                 <a:solidFill>
-                  <a:srgbClr val="E8EEF5"/>
+                  <a:srgbClr val="EAF1F8"/>
                 </a:solidFill>
                 <a:latin typeface="Calibri" pitchFamily="34" charset="0"/>
                 <a:ea typeface="Calibri" pitchFamily="34" charset="-122"/>
@@ -3128,7 +3276,7 @@
             <a:r>
               <a:rPr lang="en-US" sz="1250" dirty="0">
                 <a:solidFill>
-                  <a:srgbClr val="E8EEF5"/>
+                  <a:srgbClr val="EAF1F8"/>
                 </a:solidFill>
                 <a:latin typeface="Calibri" pitchFamily="34" charset="0"/>
                 <a:ea typeface="Calibri" pitchFamily="34" charset="-122"/>
@@ -3154,7 +3302,7 @@
     <p:bg>
       <p:bgPr>
         <a:solidFill>
-          <a:srgbClr val="0B1B2B"/>
+          <a:srgbClr val="0A1622"/>
         </a:solidFill>
       </p:bgPr>
     </p:bg>
@@ -3192,6 +3340,13 @@
             <a:srgbClr val="22D3EE"/>
           </a:solidFill>
           <a:ln/>
+          <a:effectLst>
+            <a:outerShdw sx="100000" sy="100000" kx="0" ky="0" algn="bl" rotWithShape="0" blurRad="50800" dist="25400" dir="5400000">
+              <a:srgbClr val="000000">
+                <a:alpha val="40000"/>
+              </a:srgbClr>
+            </a:outerShdw>
+          </a:effectLst>
         </p:spPr>
       </p:sp>
       <p:sp>
@@ -3221,7 +3376,7 @@
             <a:r>
               <a:rPr lang="en-US" sz="2200" b="1" dirty="0">
                 <a:solidFill>
-                  <a:srgbClr val="0B1B2B"/>
+                  <a:srgbClr val="0A1622"/>
                 </a:solidFill>
                 <a:latin typeface="Consolas" pitchFamily="34" charset="0"/>
                 <a:ea typeface="Consolas" pitchFamily="34" charset="-122"/>
@@ -3319,33 +3474,142 @@
         </p:nvSpPr>
         <p:spPr>
           <a:xfrm>
+            <a:off x="1298448" y="1316736"/>
+            <a:ext cx="1005840" cy="32004"/>
+          </a:xfrm>
+          <a:prstGeom prst="rect">
+            <a:avLst/>
+          </a:prstGeom>
+          <a:solidFill>
+            <a:srgbClr val="22D3EE"/>
+          </a:solidFill>
+          <a:ln/>
+        </p:spPr>
+      </p:sp>
+      <p:sp>
+        <p:nvSpPr>
+          <p:cNvPr id="7" name="Shape 5"/>
+          <p:cNvSpPr/>
+          <p:nvPr/>
+        </p:nvSpPr>
+        <p:spPr>
+          <a:xfrm>
             <a:off x="548640" y="1691640"/>
             <a:ext cx="8046720" cy="1828800"/>
           </a:xfrm>
-          <a:prstGeom prst="rect">
-            <a:avLst/>
-          </a:prstGeom>
-          <a:solidFill>
-            <a:srgbClr val="081320"/>
+          <a:prstGeom prst="roundRect">
+            <a:avLst>
+              <a:gd name="adj" fmla="val 1750"/>
+            </a:avLst>
+          </a:prstGeom>
+          <a:solidFill>
+            <a:srgbClr val="060F1A"/>
           </a:solidFill>
           <a:ln w="12700">
             <a:solidFill>
-              <a:srgbClr val="284963"/>
+              <a:srgbClr val="264862"/>
             </a:solidFill>
             <a:prstDash val="solid"/>
           </a:ln>
-        </p:spPr>
-      </p:sp>
-      <p:sp>
-        <p:nvSpPr>
-          <p:cNvPr id="7" name="Text 5"/>
-          <p:cNvSpPr/>
-          <p:nvPr/>
-        </p:nvSpPr>
-        <p:spPr>
-          <a:xfrm>
-            <a:off x="749808" y="1819656"/>
-            <a:ext cx="7644384" cy="1572768"/>
+          <a:effectLst>
+            <a:outerShdw sx="100000" sy="100000" kx="0" ky="0" algn="bl" rotWithShape="0" blurRad="88900" dist="38100" dir="5400000">
+              <a:srgbClr val="000000">
+                <a:alpha val="50000"/>
+              </a:srgbClr>
+            </a:outerShdw>
+          </a:effectLst>
+        </p:spPr>
+      </p:sp>
+      <p:sp>
+        <p:nvSpPr>
+          <p:cNvPr id="8" name="Shape 6"/>
+          <p:cNvSpPr/>
+          <p:nvPr/>
+        </p:nvSpPr>
+        <p:spPr>
+          <a:xfrm>
+            <a:off x="566928" y="1728216"/>
+            <a:ext cx="8010144" cy="274320"/>
+          </a:xfrm>
+          <a:prstGeom prst="rect">
+            <a:avLst/>
+          </a:prstGeom>
+          <a:solidFill>
+            <a:srgbClr val="13283C"/>
+          </a:solidFill>
+          <a:ln/>
+        </p:spPr>
+      </p:sp>
+      <p:sp>
+        <p:nvSpPr>
+          <p:cNvPr id="9" name="Shape 7"/>
+          <p:cNvSpPr/>
+          <p:nvPr/>
+        </p:nvSpPr>
+        <p:spPr>
+          <a:xfrm>
+            <a:off x="713232" y="1801368"/>
+            <a:ext cx="118872" cy="118872"/>
+          </a:xfrm>
+          <a:prstGeom prst="ellipse">
+            <a:avLst/>
+          </a:prstGeom>
+          <a:solidFill>
+            <a:srgbClr val="FB7185"/>
+          </a:solidFill>
+          <a:ln/>
+        </p:spPr>
+      </p:sp>
+      <p:sp>
+        <p:nvSpPr>
+          <p:cNvPr id="10" name="Shape 8"/>
+          <p:cNvSpPr/>
+          <p:nvPr/>
+        </p:nvSpPr>
+        <p:spPr>
+          <a:xfrm>
+            <a:off x="886968" y="1801368"/>
+            <a:ext cx="118872" cy="118872"/>
+          </a:xfrm>
+          <a:prstGeom prst="ellipse">
+            <a:avLst/>
+          </a:prstGeom>
+          <a:solidFill>
+            <a:srgbClr val="FBBF24"/>
+          </a:solidFill>
+          <a:ln/>
+        </p:spPr>
+      </p:sp>
+      <p:sp>
+        <p:nvSpPr>
+          <p:cNvPr id="11" name="Shape 9"/>
+          <p:cNvSpPr/>
+          <p:nvPr/>
+        </p:nvSpPr>
+        <p:spPr>
+          <a:xfrm>
+            <a:off x="1060704" y="1801368"/>
+            <a:ext cx="118872" cy="118872"/>
+          </a:xfrm>
+          <a:prstGeom prst="ellipse">
+            <a:avLst/>
+          </a:prstGeom>
+          <a:solidFill>
+            <a:srgbClr val="34D399"/>
+          </a:solidFill>
+          <a:ln/>
+        </p:spPr>
+      </p:sp>
+      <p:sp>
+        <p:nvSpPr>
+          <p:cNvPr id="12" name="Text 10"/>
+          <p:cNvSpPr/>
+          <p:nvPr/>
+        </p:nvSpPr>
+        <p:spPr>
+          <a:xfrm>
+            <a:off x="768096" y="2112264"/>
+            <a:ext cx="7626096" cy="1280160"/>
           </a:xfrm>
           <a:prstGeom prst="rect">
             <a:avLst/>
@@ -3428,7 +3692,7 @@
       </p:sp>
       <p:sp>
         <p:nvSpPr>
-          <p:cNvPr id="8" name="Text 6"/>
+          <p:cNvPr id="13" name="Text 11"/>
           <p:cNvSpPr/>
           <p:nvPr/>
         </p:nvSpPr>
@@ -3457,7 +3721,7 @@
             <a:r>
               <a:rPr lang="en-US" sz="1400" dirty="0">
                 <a:solidFill>
-                  <a:srgbClr val="E8EEF5"/>
+                  <a:srgbClr val="EAF1F8"/>
                 </a:solidFill>
                 <a:latin typeface="Calibri" pitchFamily="34" charset="0"/>
                 <a:ea typeface="Calibri" pitchFamily="34" charset="-122"/>
@@ -3483,7 +3747,7 @@
     <p:bg>
       <p:bgPr>
         <a:solidFill>
-          <a:srgbClr val="0B1B2B"/>
+          <a:srgbClr val="0A1622"/>
         </a:solidFill>
       </p:bgPr>
     </p:bg>
@@ -3521,6 +3785,13 @@
             <a:srgbClr val="22D3EE"/>
           </a:solidFill>
           <a:ln/>
+          <a:effectLst>
+            <a:outerShdw sx="100000" sy="100000" kx="0" ky="0" algn="bl" rotWithShape="0" blurRad="50800" dist="25400" dir="5400000">
+              <a:srgbClr val="000000">
+                <a:alpha val="40000"/>
+              </a:srgbClr>
+            </a:outerShdw>
+          </a:effectLst>
         </p:spPr>
       </p:sp>
       <p:sp>
@@ -3550,7 +3821,7 @@
             <a:r>
               <a:rPr lang="en-US" sz="2200" b="1" dirty="0">
                 <a:solidFill>
-                  <a:srgbClr val="0B1B2B"/>
+                  <a:srgbClr val="0A1622"/>
                 </a:solidFill>
                 <a:latin typeface="Consolas" pitchFamily="34" charset="0"/>
                 <a:ea typeface="Consolas" pitchFamily="34" charset="-122"/>
@@ -3642,7 +3913,27 @@
       </p:sp>
       <p:sp>
         <p:nvSpPr>
-          <p:cNvPr id="6" name="Text 4"/>
+          <p:cNvPr id="6" name="Shape 4"/>
+          <p:cNvSpPr/>
+          <p:nvPr/>
+        </p:nvSpPr>
+        <p:spPr>
+          <a:xfrm>
+            <a:off x="1298448" y="1316736"/>
+            <a:ext cx="1005840" cy="32004"/>
+          </a:xfrm>
+          <a:prstGeom prst="rect">
+            <a:avLst/>
+          </a:prstGeom>
+          <a:solidFill>
+            <a:srgbClr val="22D3EE"/>
+          </a:solidFill>
+          <a:ln/>
+        </p:spPr>
+      </p:sp>
+      <p:sp>
+        <p:nvSpPr>
+          <p:cNvPr id="7" name="Text 5"/>
           <p:cNvSpPr/>
           <p:nvPr/>
         </p:nvSpPr>
@@ -3671,7 +3962,7 @@
             <a:r>
               <a:rPr lang="en-US" sz="1600" b="1" dirty="0">
                 <a:solidFill>
-                  <a:srgbClr val="E8EEF5"/>
+                  <a:srgbClr val="EAF1F8"/>
                 </a:solidFill>
                 <a:latin typeface="Calibri" pitchFamily="34" charset="0"/>
                 <a:ea typeface="Calibri" pitchFamily="34" charset="-122"/>
@@ -3692,7 +3983,7 @@
             <a:r>
               <a:rPr lang="en-US" sz="1600" b="1" dirty="0">
                 <a:solidFill>
-                  <a:srgbClr val="E8EEF5"/>
+                  <a:srgbClr val="EAF1F8"/>
                 </a:solidFill>
                 <a:latin typeface="Calibri" pitchFamily="34" charset="0"/>
                 <a:ea typeface="Calibri" pitchFamily="34" charset="-122"/>
@@ -3713,7 +4004,7 @@
             <a:r>
               <a:rPr lang="en-US" sz="1600" b="1" dirty="0">
                 <a:solidFill>
-                  <a:srgbClr val="E8EEF5"/>
+                  <a:srgbClr val="EAF1F8"/>
                 </a:solidFill>
                 <a:latin typeface="Calibri" pitchFamily="34" charset="0"/>
                 <a:ea typeface="Calibri" pitchFamily="34" charset="-122"/>
@@ -3734,7 +4025,7 @@
             <a:r>
               <a:rPr lang="en-US" sz="1600" b="1" dirty="0">
                 <a:solidFill>
-                  <a:srgbClr val="E8EEF5"/>
+                  <a:srgbClr val="EAF1F8"/>
                 </a:solidFill>
                 <a:latin typeface="Calibri" pitchFamily="34" charset="0"/>
                 <a:ea typeface="Calibri" pitchFamily="34" charset="-122"/>
@@ -3760,7 +4051,7 @@
     <p:bg>
       <p:bgPr>
         <a:solidFill>
-          <a:srgbClr val="0B1B2B"/>
+          <a:srgbClr val="0A1622"/>
         </a:solidFill>
       </p:bgPr>
     </p:bg>
@@ -3883,7 +4174,7 @@
             <a:r>
               <a:rPr lang="en-US" sz="1600" dirty="0">
                 <a:solidFill>
-                  <a:srgbClr val="A8B4C4"/>
+                  <a:srgbClr val="9FB0C2"/>
                 </a:solidFill>
                 <a:latin typeface="Calibri" pitchFamily="34" charset="0"/>
                 <a:ea typeface="Calibri" pitchFamily="34" charset="-122"/>
@@ -3909,7 +4200,7 @@
     <p:bg>
       <p:bgPr>
         <a:solidFill>
-          <a:srgbClr val="0B1B2B"/>
+          <a:srgbClr val="0A1622"/>
         </a:solidFill>
       </p:bgPr>
     </p:bg>
@@ -3947,6 +4238,13 @@
             <a:srgbClr val="22D3EE"/>
           </a:solidFill>
           <a:ln/>
+          <a:effectLst>
+            <a:outerShdw sx="100000" sy="100000" kx="0" ky="0" algn="bl" rotWithShape="0" blurRad="50800" dist="25400" dir="5400000">
+              <a:srgbClr val="000000">
+                <a:alpha val="40000"/>
+              </a:srgbClr>
+            </a:outerShdw>
+          </a:effectLst>
         </p:spPr>
       </p:sp>
       <p:sp>
@@ -3976,7 +4274,7 @@
             <a:r>
               <a:rPr lang="en-US" sz="2200" b="1" dirty="0">
                 <a:solidFill>
-                  <a:srgbClr val="0B1B2B"/>
+                  <a:srgbClr val="0A1622"/>
                 </a:solidFill>
                 <a:latin typeface="Consolas" pitchFamily="34" charset="0"/>
                 <a:ea typeface="Consolas" pitchFamily="34" charset="-122"/>
@@ -4068,7 +4366,27 @@
       </p:sp>
       <p:sp>
         <p:nvSpPr>
-          <p:cNvPr id="6" name="Text 4"/>
+          <p:cNvPr id="6" name="Shape 4"/>
+          <p:cNvSpPr/>
+          <p:nvPr/>
+        </p:nvSpPr>
+        <p:spPr>
+          <a:xfrm>
+            <a:off x="1298448" y="1316736"/>
+            <a:ext cx="1005840" cy="32004"/>
+          </a:xfrm>
+          <a:prstGeom prst="rect">
+            <a:avLst/>
+          </a:prstGeom>
+          <a:solidFill>
+            <a:srgbClr val="22D3EE"/>
+          </a:solidFill>
+          <a:ln/>
+        </p:spPr>
+      </p:sp>
+      <p:sp>
+        <p:nvSpPr>
+          <p:cNvPr id="7" name="Text 5"/>
           <p:cNvSpPr/>
           <p:nvPr/>
         </p:nvSpPr>
@@ -4097,7 +4415,7 @@
             <a:r>
               <a:rPr lang="en-US" sz="1600" b="1" dirty="0">
                 <a:solidFill>
-                  <a:srgbClr val="E8EEF5"/>
+                  <a:srgbClr val="EAF1F8"/>
                 </a:solidFill>
                 <a:latin typeface="Calibri" pitchFamily="34" charset="0"/>
                 <a:ea typeface="Calibri" pitchFamily="34" charset="-122"/>
@@ -4118,7 +4436,7 @@
             <a:r>
               <a:rPr lang="en-US" sz="1600" dirty="0">
                 <a:solidFill>
-                  <a:srgbClr val="E8EEF5"/>
+                  <a:srgbClr val="EAF1F8"/>
                 </a:solidFill>
                 <a:latin typeface="Calibri" pitchFamily="34" charset="0"/>
                 <a:ea typeface="Calibri" pitchFamily="34" charset="-122"/>
@@ -4139,7 +4457,7 @@
             <a:r>
               <a:rPr lang="en-US" sz="1600" dirty="0">
                 <a:solidFill>
-                  <a:srgbClr val="E8EEF5"/>
+                  <a:srgbClr val="EAF1F8"/>
                 </a:solidFill>
                 <a:latin typeface="Calibri" pitchFamily="34" charset="0"/>
                 <a:ea typeface="Calibri" pitchFamily="34" charset="-122"/>
@@ -4160,7 +4478,7 @@
             <a:r>
               <a:rPr lang="en-US" sz="1600" dirty="0">
                 <a:solidFill>
-                  <a:srgbClr val="E8EEF5"/>
+                  <a:srgbClr val="EAF1F8"/>
                 </a:solidFill>
                 <a:latin typeface="Calibri" pitchFamily="34" charset="0"/>
                 <a:ea typeface="Calibri" pitchFamily="34" charset="-122"/>
@@ -4186,7 +4504,7 @@
     <p:bg>
       <p:bgPr>
         <a:solidFill>
-          <a:srgbClr val="0B1B2B"/>
+          <a:srgbClr val="0A1622"/>
         </a:solidFill>
       </p:bgPr>
     </p:bg>
@@ -4224,6 +4542,13 @@
             <a:srgbClr val="22D3EE"/>
           </a:solidFill>
           <a:ln/>
+          <a:effectLst>
+            <a:outerShdw sx="100000" sy="100000" kx="0" ky="0" algn="bl" rotWithShape="0" blurRad="50800" dist="25400" dir="5400000">
+              <a:srgbClr val="000000">
+                <a:alpha val="40000"/>
+              </a:srgbClr>
+            </a:outerShdw>
+          </a:effectLst>
         </p:spPr>
       </p:sp>
       <p:sp>
@@ -4253,7 +4578,7 @@
             <a:r>
               <a:rPr lang="en-US" sz="2200" b="1" dirty="0">
                 <a:solidFill>
-                  <a:srgbClr val="0B1B2B"/>
+                  <a:srgbClr val="0A1622"/>
                 </a:solidFill>
                 <a:latin typeface="Consolas" pitchFamily="34" charset="0"/>
                 <a:ea typeface="Consolas" pitchFamily="34" charset="-122"/>
@@ -4351,14 +4676,36 @@
         </p:nvSpPr>
         <p:spPr>
           <a:xfrm>
+            <a:off x="1298448" y="1316736"/>
+            <a:ext cx="1005840" cy="32004"/>
+          </a:xfrm>
+          <a:prstGeom prst="rect">
+            <a:avLst/>
+          </a:prstGeom>
+          <a:solidFill>
+            <a:srgbClr val="22D3EE"/>
+          </a:solidFill>
+          <a:ln/>
+        </p:spPr>
+      </p:sp>
+      <p:sp>
+        <p:nvSpPr>
+          <p:cNvPr id="7" name="Shape 5"/>
+          <p:cNvSpPr/>
+          <p:nvPr/>
+        </p:nvSpPr>
+        <p:spPr>
+          <a:xfrm>
             <a:off x="548640" y="1691640"/>
             <a:ext cx="3886200" cy="2743200"/>
           </a:xfrm>
-          <a:prstGeom prst="rect">
-            <a:avLst/>
-          </a:prstGeom>
-          <a:solidFill>
-            <a:srgbClr val="12293D"/>
+          <a:prstGeom prst="roundRect">
+            <a:avLst>
+              <a:gd name="adj" fmla="val 1667"/>
+            </a:avLst>
+          </a:prstGeom>
+          <a:solidFill>
+            <a:srgbClr val="13283C"/>
           </a:solidFill>
           <a:ln w="15875">
             <a:solidFill>
@@ -4366,18 +4713,25 @@
             </a:solidFill>
             <a:prstDash val="solid"/>
           </a:ln>
-        </p:spPr>
-      </p:sp>
-      <p:sp>
-        <p:nvSpPr>
-          <p:cNvPr id="7" name="Shape 5"/>
-          <p:cNvSpPr/>
-          <p:nvPr/>
-        </p:nvSpPr>
-        <p:spPr>
-          <a:xfrm>
-            <a:off x="548640" y="1691640"/>
-            <a:ext cx="82296" cy="2743200"/>
+          <a:effectLst>
+            <a:outerShdw sx="100000" sy="100000" kx="0" ky="0" algn="bl" rotWithShape="0" blurRad="88900" dist="38100" dir="5400000">
+              <a:srgbClr val="000000">
+                <a:alpha val="50000"/>
+              </a:srgbClr>
+            </a:outerShdw>
+          </a:effectLst>
+        </p:spPr>
+      </p:sp>
+      <p:sp>
+        <p:nvSpPr>
+          <p:cNvPr id="8" name="Shape 6"/>
+          <p:cNvSpPr/>
+          <p:nvPr/>
+        </p:nvSpPr>
+        <p:spPr>
+          <a:xfrm>
+            <a:off x="562356" y="1764792"/>
+            <a:ext cx="73152" cy="2596896"/>
           </a:xfrm>
           <a:prstGeom prst="rect">
             <a:avLst/>
@@ -4390,14 +4744,14 @@
       </p:sp>
       <p:sp>
         <p:nvSpPr>
-          <p:cNvPr id="8" name="Text 6"/>
-          <p:cNvSpPr/>
-          <p:nvPr/>
-        </p:nvSpPr>
-        <p:spPr>
-          <a:xfrm>
-            <a:off x="786384" y="1837944"/>
-            <a:ext cx="3502152" cy="384048"/>
+          <p:cNvPr id="9" name="Text 7"/>
+          <p:cNvSpPr/>
+          <p:nvPr/>
+        </p:nvSpPr>
+        <p:spPr>
+          <a:xfrm>
+            <a:off x="804672" y="1828800"/>
+            <a:ext cx="3483864" cy="384048"/>
           </a:xfrm>
           <a:prstGeom prst="rect">
             <a:avLst/>
@@ -4413,7 +4767,7 @@
               <a:buNone/>
             </a:pPr>
             <a:r>
-              <a:rPr lang="en-US" sz="1500" b="1" dirty="0">
+              <a:rPr lang="en-US" sz="1500" b="1" spc="50" kern="0" dirty="0">
                 <a:solidFill>
                   <a:srgbClr val="22D3EE"/>
                 </a:solidFill>
@@ -4429,14 +4783,34 @@
       </p:sp>
       <p:sp>
         <p:nvSpPr>
-          <p:cNvPr id="9" name="Text 7"/>
-          <p:cNvSpPr/>
-          <p:nvPr/>
-        </p:nvSpPr>
-        <p:spPr>
-          <a:xfrm>
-            <a:off x="786384" y="2276856"/>
-            <a:ext cx="3429000" cy="2011680"/>
+          <p:cNvPr id="10" name="Shape 8"/>
+          <p:cNvSpPr/>
+          <p:nvPr/>
+        </p:nvSpPr>
+        <p:spPr>
+          <a:xfrm>
+            <a:off x="804672" y="2221992"/>
+            <a:ext cx="3374136" cy="16459"/>
+          </a:xfrm>
+          <a:prstGeom prst="rect">
+            <a:avLst/>
+          </a:prstGeom>
+          <a:solidFill>
+            <a:srgbClr val="264862"/>
+          </a:solidFill>
+          <a:ln/>
+        </p:spPr>
+      </p:sp>
+      <p:sp>
+        <p:nvSpPr>
+          <p:cNvPr id="11" name="Text 9"/>
+          <p:cNvSpPr/>
+          <p:nvPr/>
+        </p:nvSpPr>
+        <p:spPr>
+          <a:xfrm>
+            <a:off x="804672" y="2331720"/>
+            <a:ext cx="3410712" cy="1956816"/>
           </a:xfrm>
           <a:prstGeom prst="rect">
             <a:avLst/>
@@ -4458,7 +4832,7 @@
             <a:r>
               <a:rPr lang="en-US" sz="1250" dirty="0">
                 <a:solidFill>
-                  <a:srgbClr val="E8EEF5"/>
+                  <a:srgbClr val="EAF1F8"/>
                 </a:solidFill>
                 <a:latin typeface="Calibri" pitchFamily="34" charset="0"/>
                 <a:ea typeface="Calibri" pitchFamily="34" charset="-122"/>
@@ -4479,7 +4853,7 @@
             <a:r>
               <a:rPr lang="en-US" sz="1250" dirty="0">
                 <a:solidFill>
-                  <a:srgbClr val="E8EEF5"/>
+                  <a:srgbClr val="EAF1F8"/>
                 </a:solidFill>
                 <a:latin typeface="Calibri" pitchFamily="34" charset="0"/>
                 <a:ea typeface="Calibri" pitchFamily="34" charset="-122"/>
@@ -4500,7 +4874,7 @@
             <a:r>
               <a:rPr lang="en-US" sz="1250" dirty="0">
                 <a:solidFill>
-                  <a:srgbClr val="E8EEF5"/>
+                  <a:srgbClr val="EAF1F8"/>
                 </a:solidFill>
                 <a:latin typeface="Calibri" pitchFamily="34" charset="0"/>
                 <a:ea typeface="Calibri" pitchFamily="34" charset="-122"/>
@@ -4521,7 +4895,7 @@
             <a:r>
               <a:rPr lang="en-US" sz="1250" dirty="0">
                 <a:solidFill>
-                  <a:srgbClr val="E8EEF5"/>
+                  <a:srgbClr val="EAF1F8"/>
                 </a:solidFill>
                 <a:latin typeface="Calibri" pitchFamily="34" charset="0"/>
                 <a:ea typeface="Calibri" pitchFamily="34" charset="-122"/>
@@ -4535,7 +4909,7 @@
       </p:sp>
       <p:sp>
         <p:nvSpPr>
-          <p:cNvPr id="10" name="Shape 8"/>
+          <p:cNvPr id="12" name="Shape 10"/>
           <p:cNvSpPr/>
           <p:nvPr/>
         </p:nvSpPr>
@@ -4544,11 +4918,13 @@
             <a:off x="4663440" y="1691640"/>
             <a:ext cx="3931920" cy="2743200"/>
           </a:xfrm>
-          <a:prstGeom prst="rect">
-            <a:avLst/>
-          </a:prstGeom>
-          <a:solidFill>
-            <a:srgbClr val="12293D"/>
+          <a:prstGeom prst="roundRect">
+            <a:avLst>
+              <a:gd name="adj" fmla="val 1667"/>
+            </a:avLst>
+          </a:prstGeom>
+          <a:solidFill>
+            <a:srgbClr val="13283C"/>
           </a:solidFill>
           <a:ln w="15875">
             <a:solidFill>
@@ -4556,18 +4932,25 @@
             </a:solidFill>
             <a:prstDash val="solid"/>
           </a:ln>
-        </p:spPr>
-      </p:sp>
-      <p:sp>
-        <p:nvSpPr>
-          <p:cNvPr id="11" name="Shape 9"/>
-          <p:cNvSpPr/>
-          <p:nvPr/>
-        </p:nvSpPr>
-        <p:spPr>
-          <a:xfrm>
-            <a:off x="4663440" y="1691640"/>
-            <a:ext cx="82296" cy="2743200"/>
+          <a:effectLst>
+            <a:outerShdw sx="100000" sy="100000" kx="0" ky="0" algn="bl" rotWithShape="0" blurRad="88900" dist="38100" dir="5400000">
+              <a:srgbClr val="000000">
+                <a:alpha val="50000"/>
+              </a:srgbClr>
+            </a:outerShdw>
+          </a:effectLst>
+        </p:spPr>
+      </p:sp>
+      <p:sp>
+        <p:nvSpPr>
+          <p:cNvPr id="13" name="Shape 11"/>
+          <p:cNvSpPr/>
+          <p:nvPr/>
+        </p:nvSpPr>
+        <p:spPr>
+          <a:xfrm>
+            <a:off x="4677156" y="1764792"/>
+            <a:ext cx="73152" cy="2596896"/>
           </a:xfrm>
           <a:prstGeom prst="rect">
             <a:avLst/>
@@ -4580,14 +4963,14 @@
       </p:sp>
       <p:sp>
         <p:nvSpPr>
-          <p:cNvPr id="12" name="Text 10"/>
-          <p:cNvSpPr/>
-          <p:nvPr/>
-        </p:nvSpPr>
-        <p:spPr>
-          <a:xfrm>
-            <a:off x="4901184" y="1837944"/>
-            <a:ext cx="3547872" cy="384048"/>
+          <p:cNvPr id="14" name="Text 12"/>
+          <p:cNvSpPr/>
+          <p:nvPr/>
+        </p:nvSpPr>
+        <p:spPr>
+          <a:xfrm>
+            <a:off x="4919472" y="1828800"/>
+            <a:ext cx="3529584" cy="384048"/>
           </a:xfrm>
           <a:prstGeom prst="rect">
             <a:avLst/>
@@ -4603,7 +4986,7 @@
               <a:buNone/>
             </a:pPr>
             <a:r>
-              <a:rPr lang="en-US" sz="1500" b="1" dirty="0">
+              <a:rPr lang="en-US" sz="1500" b="1" spc="50" kern="0" dirty="0">
                 <a:solidFill>
                   <a:srgbClr val="34D399"/>
                 </a:solidFill>
@@ -4619,14 +5002,34 @@
       </p:sp>
       <p:sp>
         <p:nvSpPr>
-          <p:cNvPr id="13" name="Text 11"/>
-          <p:cNvSpPr/>
-          <p:nvPr/>
-        </p:nvSpPr>
-        <p:spPr>
-          <a:xfrm>
-            <a:off x="4901184" y="2276856"/>
-            <a:ext cx="3474720" cy="2011680"/>
+          <p:cNvPr id="15" name="Shape 13"/>
+          <p:cNvSpPr/>
+          <p:nvPr/>
+        </p:nvSpPr>
+        <p:spPr>
+          <a:xfrm>
+            <a:off x="4919472" y="2221992"/>
+            <a:ext cx="3419856" cy="16459"/>
+          </a:xfrm>
+          <a:prstGeom prst="rect">
+            <a:avLst/>
+          </a:prstGeom>
+          <a:solidFill>
+            <a:srgbClr val="264862"/>
+          </a:solidFill>
+          <a:ln/>
+        </p:spPr>
+      </p:sp>
+      <p:sp>
+        <p:nvSpPr>
+          <p:cNvPr id="16" name="Text 14"/>
+          <p:cNvSpPr/>
+          <p:nvPr/>
+        </p:nvSpPr>
+        <p:spPr>
+          <a:xfrm>
+            <a:off x="4919472" y="2331720"/>
+            <a:ext cx="3456432" cy="1956816"/>
           </a:xfrm>
           <a:prstGeom prst="rect">
             <a:avLst/>
@@ -4648,7 +5051,7 @@
             <a:r>
               <a:rPr lang="en-US" sz="1250" dirty="0">
                 <a:solidFill>
-                  <a:srgbClr val="E8EEF5"/>
+                  <a:srgbClr val="EAF1F8"/>
                 </a:solidFill>
                 <a:latin typeface="Calibri" pitchFamily="34" charset="0"/>
                 <a:ea typeface="Calibri" pitchFamily="34" charset="-122"/>
@@ -4669,7 +5072,7 @@
             <a:r>
               <a:rPr lang="en-US" sz="1250" dirty="0">
                 <a:solidFill>
-                  <a:srgbClr val="E8EEF5"/>
+                  <a:srgbClr val="EAF1F8"/>
                 </a:solidFill>
                 <a:latin typeface="Calibri" pitchFamily="34" charset="0"/>
                 <a:ea typeface="Calibri" pitchFamily="34" charset="-122"/>
@@ -4690,7 +5093,7 @@
             <a:r>
               <a:rPr lang="en-US" sz="1250" dirty="0">
                 <a:solidFill>
-                  <a:srgbClr val="E8EEF5"/>
+                  <a:srgbClr val="EAF1F8"/>
                 </a:solidFill>
                 <a:latin typeface="Calibri" pitchFamily="34" charset="0"/>
                 <a:ea typeface="Calibri" pitchFamily="34" charset="-122"/>
@@ -4711,7 +5114,7 @@
             <a:r>
               <a:rPr lang="en-US" sz="1250" dirty="0">
                 <a:solidFill>
-                  <a:srgbClr val="E8EEF5"/>
+                  <a:srgbClr val="EAF1F8"/>
                 </a:solidFill>
                 <a:latin typeface="Calibri" pitchFamily="34" charset="0"/>
                 <a:ea typeface="Calibri" pitchFamily="34" charset="-122"/>
@@ -4737,7 +5140,7 @@
     <p:bg>
       <p:bgPr>
         <a:solidFill>
-          <a:srgbClr val="0B1B2B"/>
+          <a:srgbClr val="0A1622"/>
         </a:solidFill>
       </p:bgPr>
     </p:bg>
@@ -4775,6 +5178,13 @@
             <a:srgbClr val="22D3EE"/>
           </a:solidFill>
           <a:ln/>
+          <a:effectLst>
+            <a:outerShdw sx="100000" sy="100000" kx="0" ky="0" algn="bl" rotWithShape="0" blurRad="50800" dist="25400" dir="5400000">
+              <a:srgbClr val="000000">
+                <a:alpha val="40000"/>
+              </a:srgbClr>
+            </a:outerShdw>
+          </a:effectLst>
         </p:spPr>
       </p:sp>
       <p:sp>
@@ -4804,7 +5214,7 @@
             <a:r>
               <a:rPr lang="en-US" sz="2200" b="1" dirty="0">
                 <a:solidFill>
-                  <a:srgbClr val="0B1B2B"/>
+                  <a:srgbClr val="0A1622"/>
                 </a:solidFill>
                 <a:latin typeface="Consolas" pitchFamily="34" charset="0"/>
                 <a:ea typeface="Consolas" pitchFamily="34" charset="-122"/>
@@ -4893,6 +5303,26 @@
             <a:endParaRPr lang="en-US" sz="2500" dirty="0"/>
           </a:p>
         </p:txBody>
+      </p:sp>
+      <p:sp>
+        <p:nvSpPr>
+          <p:cNvPr id="6" name="Shape 4"/>
+          <p:cNvSpPr/>
+          <p:nvPr/>
+        </p:nvSpPr>
+        <p:spPr>
+          <a:xfrm>
+            <a:off x="1298448" y="1316736"/>
+            <a:ext cx="1005840" cy="32004"/>
+          </a:xfrm>
+          <a:prstGeom prst="rect">
+            <a:avLst/>
+          </a:prstGeom>
+          <a:solidFill>
+            <a:srgbClr val="22D3EE"/>
+          </a:solidFill>
+          <a:ln/>
+        </p:spPr>
       </p:sp>
       <p:graphicFrame>
         <p:nvGraphicFramePr>
@@ -4932,7 +5362,7 @@
                       <a:r>
                         <a:rPr lang="en-US" sz="1250" b="1" dirty="0">
                           <a:solidFill>
-                            <a:srgbClr val="0B1B2B"/>
+                            <a:srgbClr val="0A1622"/>
                           </a:solidFill>
                           <a:latin typeface="Calibri" pitchFamily="34" charset="0"/>
                           <a:ea typeface="Calibri" pitchFamily="34" charset="-122"/>
@@ -4947,10 +5377,10 @@
                       </a:endParaRPr>
                     </a:p>
                   </a:txBody>
-                  <a:tcPr marL="50800" marR="50800" marT="50800" marB="50800" anchor="ctr">
+                  <a:tcPr marL="76200" marR="76200" marT="76200" marB="76200" anchor="ctr">
                     <a:lnL w="12700" cap="flat" cmpd="sng" algn="ctr">
                       <a:solidFill>
-                        <a:srgbClr val="284963"/>
+                        <a:srgbClr val="264862"/>
                       </a:solidFill>
                       <a:prstDash val="solid"/>
                       <a:round/>
@@ -4959,7 +5389,7 @@
                     </a:lnL>
                     <a:lnR w="12700" cap="flat" cmpd="sng" algn="ctr">
                       <a:solidFill>
-                        <a:srgbClr val="284963"/>
+                        <a:srgbClr val="264862"/>
                       </a:solidFill>
                       <a:prstDash val="solid"/>
                       <a:round/>
@@ -4968,7 +5398,7 @@
                     </a:lnR>
                     <a:lnT w="12700" cap="flat" cmpd="sng" algn="ctr">
                       <a:solidFill>
-                        <a:srgbClr val="284963"/>
+                        <a:srgbClr val="264862"/>
                       </a:solidFill>
                       <a:prstDash val="solid"/>
                       <a:round/>
@@ -4977,7 +5407,7 @@
                     </a:lnT>
                     <a:lnB w="12700" cap="flat" cmpd="sng" algn="ctr">
                       <a:solidFill>
-                        <a:srgbClr val="284963"/>
+                        <a:srgbClr val="264862"/>
                       </a:solidFill>
                       <a:prstDash val="solid"/>
                       <a:round/>
@@ -5000,7 +5430,7 @@
                       <a:r>
                         <a:rPr lang="en-US" sz="1250" b="1" dirty="0">
                           <a:solidFill>
-                            <a:srgbClr val="0B1B2B"/>
+                            <a:srgbClr val="0A1622"/>
                           </a:solidFill>
                           <a:latin typeface="Calibri" pitchFamily="34" charset="0"/>
                           <a:ea typeface="Calibri" pitchFamily="34" charset="-122"/>
@@ -5015,10 +5445,10 @@
                       </a:endParaRPr>
                     </a:p>
                   </a:txBody>
-                  <a:tcPr marL="50800" marR="50800" marT="50800" marB="50800" anchor="ctr">
+                  <a:tcPr marL="76200" marR="76200" marT="76200" marB="76200" anchor="ctr">
                     <a:lnL w="12700" cap="flat" cmpd="sng" algn="ctr">
                       <a:solidFill>
-                        <a:srgbClr val="284963"/>
+                        <a:srgbClr val="264862"/>
                       </a:solidFill>
                       <a:prstDash val="solid"/>
                       <a:round/>
@@ -5027,7 +5457,7 @@
                     </a:lnL>
                     <a:lnR w="12700" cap="flat" cmpd="sng" algn="ctr">
                       <a:solidFill>
-                        <a:srgbClr val="284963"/>
+                        <a:srgbClr val="264862"/>
                       </a:solidFill>
                       <a:prstDash val="solid"/>
                       <a:round/>
@@ -5036,7 +5466,7 @@
                     </a:lnR>
                     <a:lnT w="12700" cap="flat" cmpd="sng" algn="ctr">
                       <a:solidFill>
-                        <a:srgbClr val="284963"/>
+                        <a:srgbClr val="264862"/>
                       </a:solidFill>
                       <a:prstDash val="solid"/>
                       <a:round/>
@@ -5045,7 +5475,7 @@
                     </a:lnT>
                     <a:lnB w="12700" cap="flat" cmpd="sng" algn="ctr">
                       <a:solidFill>
-                        <a:srgbClr val="284963"/>
+                        <a:srgbClr val="264862"/>
                       </a:solidFill>
                       <a:prstDash val="solid"/>
                       <a:round/>
@@ -5070,7 +5500,7 @@
                       <a:r>
                         <a:rPr lang="en-US" sz="1150" dirty="0">
                           <a:solidFill>
-                            <a:srgbClr val="E8EEF5"/>
+                            <a:srgbClr val="EAF1F8"/>
                           </a:solidFill>
                           <a:latin typeface="Calibri" pitchFamily="34" charset="0"/>
                           <a:ea typeface="Calibri" pitchFamily="34" charset="-122"/>
@@ -5085,10 +5515,10 @@
                       </a:endParaRPr>
                     </a:p>
                   </a:txBody>
-                  <a:tcPr marL="50800" marR="50800" marT="50800" marB="50800" anchor="ctr">
+                  <a:tcPr marL="76200" marR="76200" marT="76200" marB="76200" anchor="ctr">
                     <a:lnL w="12700" cap="flat" cmpd="sng" algn="ctr">
                       <a:solidFill>
-                        <a:srgbClr val="284963"/>
+                        <a:srgbClr val="264862"/>
                       </a:solidFill>
                       <a:prstDash val="solid"/>
                       <a:round/>
@@ -5097,7 +5527,7 @@
                     </a:lnL>
                     <a:lnR w="12700" cap="flat" cmpd="sng" algn="ctr">
                       <a:solidFill>
-                        <a:srgbClr val="284963"/>
+                        <a:srgbClr val="264862"/>
                       </a:solidFill>
                       <a:prstDash val="solid"/>
                       <a:round/>
@@ -5106,7 +5536,7 @@
                     </a:lnR>
                     <a:lnT w="12700" cap="flat" cmpd="sng" algn="ctr">
                       <a:solidFill>
-                        <a:srgbClr val="284963"/>
+                        <a:srgbClr val="264862"/>
                       </a:solidFill>
                       <a:prstDash val="solid"/>
                       <a:round/>
@@ -5115,7 +5545,7 @@
                     </a:lnT>
                     <a:lnB w="12700" cap="flat" cmpd="sng" algn="ctr">
                       <a:solidFill>
-                        <a:srgbClr val="284963"/>
+                        <a:srgbClr val="264862"/>
                       </a:solidFill>
                       <a:prstDash val="solid"/>
                       <a:round/>
@@ -5123,7 +5553,7 @@
                       <a:tailEnd type="none" w="med" len="med"/>
                     </a:lnB>
                     <a:solidFill>
-                      <a:srgbClr val="16314A"/>
+                      <a:srgbClr val="0F2133"/>
                     </a:solidFill>
                   </a:tcPr>
                 </a:tc>
@@ -5138,7 +5568,7 @@
                       <a:r>
                         <a:rPr lang="en-US" sz="1150" dirty="0">
                           <a:solidFill>
-                            <a:srgbClr val="E8EEF5"/>
+                            <a:srgbClr val="EAF1F8"/>
                           </a:solidFill>
                           <a:latin typeface="Calibri" pitchFamily="34" charset="0"/>
                           <a:ea typeface="Calibri" pitchFamily="34" charset="-122"/>
@@ -5153,10 +5583,10 @@
                       </a:endParaRPr>
                     </a:p>
                   </a:txBody>
-                  <a:tcPr marL="50800" marR="50800" marT="50800" marB="50800" anchor="ctr">
+                  <a:tcPr marL="76200" marR="76200" marT="76200" marB="76200" anchor="ctr">
                     <a:lnL w="12700" cap="flat" cmpd="sng" algn="ctr">
                       <a:solidFill>
-                        <a:srgbClr val="284963"/>
+                        <a:srgbClr val="264862"/>
                       </a:solidFill>
                       <a:prstDash val="solid"/>
                       <a:round/>
@@ -5165,7 +5595,7 @@
                     </a:lnL>
                     <a:lnR w="12700" cap="flat" cmpd="sng" algn="ctr">
                       <a:solidFill>
-                        <a:srgbClr val="284963"/>
+                        <a:srgbClr val="264862"/>
                       </a:solidFill>
                       <a:prstDash val="solid"/>
                       <a:round/>
@@ -5174,7 +5604,7 @@
                     </a:lnR>
                     <a:lnT w="12700" cap="flat" cmpd="sng" algn="ctr">
                       <a:solidFill>
-                        <a:srgbClr val="284963"/>
+                        <a:srgbClr val="264862"/>
                       </a:solidFill>
                       <a:prstDash val="solid"/>
                       <a:round/>
@@ -5183,7 +5613,7 @@
                     </a:lnT>
                     <a:lnB w="12700" cap="flat" cmpd="sng" algn="ctr">
                       <a:solidFill>
-                        <a:srgbClr val="284963"/>
+                        <a:srgbClr val="264862"/>
                       </a:solidFill>
                       <a:prstDash val="solid"/>
                       <a:round/>
@@ -5191,7 +5621,7 @@
                       <a:tailEnd type="none" w="med" len="med"/>
                     </a:lnB>
                     <a:solidFill>
-                      <a:srgbClr val="16314A"/>
+                      <a:srgbClr val="0F2133"/>
                     </a:solidFill>
                   </a:tcPr>
                 </a:tc>
@@ -5208,7 +5638,7 @@
                       <a:r>
                         <a:rPr lang="en-US" sz="1150" dirty="0">
                           <a:solidFill>
-                            <a:srgbClr val="E8EEF5"/>
+                            <a:srgbClr val="EAF1F8"/>
                           </a:solidFill>
                           <a:latin typeface="Calibri" pitchFamily="34" charset="0"/>
                           <a:ea typeface="Calibri" pitchFamily="34" charset="-122"/>
@@ -5223,10 +5653,10 @@
                       </a:endParaRPr>
                     </a:p>
                   </a:txBody>
-                  <a:tcPr marL="50800" marR="50800" marT="50800" marB="50800" anchor="ctr">
+                  <a:tcPr marL="76200" marR="76200" marT="76200" marB="76200" anchor="ctr">
                     <a:lnL w="12700" cap="flat" cmpd="sng" algn="ctr">
                       <a:solidFill>
-                        <a:srgbClr val="284963"/>
+                        <a:srgbClr val="264862"/>
                       </a:solidFill>
                       <a:prstDash val="solid"/>
                       <a:round/>
@@ -5235,7 +5665,7 @@
                     </a:lnL>
                     <a:lnR w="12700" cap="flat" cmpd="sng" algn="ctr">
                       <a:solidFill>
-                        <a:srgbClr val="284963"/>
+                        <a:srgbClr val="264862"/>
                       </a:solidFill>
                       <a:prstDash val="solid"/>
                       <a:round/>
@@ -5244,7 +5674,7 @@
                     </a:lnR>
                     <a:lnT w="12700" cap="flat" cmpd="sng" algn="ctr">
                       <a:solidFill>
-                        <a:srgbClr val="284963"/>
+                        <a:srgbClr val="264862"/>
                       </a:solidFill>
                       <a:prstDash val="solid"/>
                       <a:round/>
@@ -5253,7 +5683,7 @@
                     </a:lnT>
                     <a:lnB w="12700" cap="flat" cmpd="sng" algn="ctr">
                       <a:solidFill>
-                        <a:srgbClr val="284963"/>
+                        <a:srgbClr val="264862"/>
                       </a:solidFill>
                       <a:prstDash val="solid"/>
                       <a:round/>
@@ -5261,7 +5691,7 @@
                       <a:tailEnd type="none" w="med" len="med"/>
                     </a:lnB>
                     <a:solidFill>
-                      <a:srgbClr val="12293D"/>
+                      <a:srgbClr val="13283C"/>
                     </a:solidFill>
                   </a:tcPr>
                 </a:tc>
@@ -5276,7 +5706,7 @@
                       <a:r>
                         <a:rPr lang="en-US" sz="1150" dirty="0">
                           <a:solidFill>
-                            <a:srgbClr val="E8EEF5"/>
+                            <a:srgbClr val="EAF1F8"/>
                           </a:solidFill>
                           <a:latin typeface="Calibri" pitchFamily="34" charset="0"/>
                           <a:ea typeface="Calibri" pitchFamily="34" charset="-122"/>
@@ -5291,10 +5721,10 @@
                       </a:endParaRPr>
                     </a:p>
                   </a:txBody>
-                  <a:tcPr marL="50800" marR="50800" marT="50800" marB="50800" anchor="ctr">
+                  <a:tcPr marL="76200" marR="76200" marT="76200" marB="76200" anchor="ctr">
                     <a:lnL w="12700" cap="flat" cmpd="sng" algn="ctr">
                       <a:solidFill>
-                        <a:srgbClr val="284963"/>
+                        <a:srgbClr val="264862"/>
                       </a:solidFill>
                       <a:prstDash val="solid"/>
                       <a:round/>
@@ -5303,7 +5733,7 @@
                     </a:lnL>
                     <a:lnR w="12700" cap="flat" cmpd="sng" algn="ctr">
                       <a:solidFill>
-                        <a:srgbClr val="284963"/>
+                        <a:srgbClr val="264862"/>
                       </a:solidFill>
                       <a:prstDash val="solid"/>
                       <a:round/>
@@ -5312,7 +5742,7 @@
                     </a:lnR>
                     <a:lnT w="12700" cap="flat" cmpd="sng" algn="ctr">
                       <a:solidFill>
-                        <a:srgbClr val="284963"/>
+                        <a:srgbClr val="264862"/>
                       </a:solidFill>
                       <a:prstDash val="solid"/>
                       <a:round/>
@@ -5321,7 +5751,7 @@
                     </a:lnT>
                     <a:lnB w="12700" cap="flat" cmpd="sng" algn="ctr">
                       <a:solidFill>
-                        <a:srgbClr val="284963"/>
+                        <a:srgbClr val="264862"/>
                       </a:solidFill>
                       <a:prstDash val="solid"/>
                       <a:round/>
@@ -5329,7 +5759,7 @@
                       <a:tailEnd type="none" w="med" len="med"/>
                     </a:lnB>
                     <a:solidFill>
-                      <a:srgbClr val="12293D"/>
+                      <a:srgbClr val="13283C"/>
                     </a:solidFill>
                   </a:tcPr>
                 </a:tc>
@@ -5346,7 +5776,7 @@
                       <a:r>
                         <a:rPr lang="en-US" sz="1150" dirty="0">
                           <a:solidFill>
-                            <a:srgbClr val="E8EEF5"/>
+                            <a:srgbClr val="EAF1F8"/>
                           </a:solidFill>
                           <a:latin typeface="Calibri" pitchFamily="34" charset="0"/>
                           <a:ea typeface="Calibri" pitchFamily="34" charset="-122"/>
@@ -5361,10 +5791,10 @@
                       </a:endParaRPr>
                     </a:p>
                   </a:txBody>
-                  <a:tcPr marL="50800" marR="50800" marT="50800" marB="50800" anchor="ctr">
+                  <a:tcPr marL="76200" marR="76200" marT="76200" marB="76200" anchor="ctr">
                     <a:lnL w="12700" cap="flat" cmpd="sng" algn="ctr">
                       <a:solidFill>
-                        <a:srgbClr val="284963"/>
+                        <a:srgbClr val="264862"/>
                       </a:solidFill>
                       <a:prstDash val="solid"/>
                       <a:round/>
@@ -5373,7 +5803,7 @@
                     </a:lnL>
                     <a:lnR w="12700" cap="flat" cmpd="sng" algn="ctr">
                       <a:solidFill>
-                        <a:srgbClr val="284963"/>
+                        <a:srgbClr val="264862"/>
                       </a:solidFill>
                       <a:prstDash val="solid"/>
                       <a:round/>
@@ -5382,7 +5812,7 @@
                     </a:lnR>
                     <a:lnT w="12700" cap="flat" cmpd="sng" algn="ctr">
                       <a:solidFill>
-                        <a:srgbClr val="284963"/>
+                        <a:srgbClr val="264862"/>
                       </a:solidFill>
                       <a:prstDash val="solid"/>
                       <a:round/>
@@ -5391,7 +5821,7 @@
                     </a:lnT>
                     <a:lnB w="12700" cap="flat" cmpd="sng" algn="ctr">
                       <a:solidFill>
-                        <a:srgbClr val="284963"/>
+                        <a:srgbClr val="264862"/>
                       </a:solidFill>
                       <a:prstDash val="solid"/>
                       <a:round/>
@@ -5399,7 +5829,7 @@
                       <a:tailEnd type="none" w="med" len="med"/>
                     </a:lnB>
                     <a:solidFill>
-                      <a:srgbClr val="16314A"/>
+                      <a:srgbClr val="0F2133"/>
                     </a:solidFill>
                   </a:tcPr>
                 </a:tc>
@@ -5414,7 +5844,7 @@
                       <a:r>
                         <a:rPr lang="en-US" sz="1150" dirty="0">
                           <a:solidFill>
-                            <a:srgbClr val="E8EEF5"/>
+                            <a:srgbClr val="EAF1F8"/>
                           </a:solidFill>
                           <a:latin typeface="Calibri" pitchFamily="34" charset="0"/>
                           <a:ea typeface="Calibri" pitchFamily="34" charset="-122"/>
@@ -5429,10 +5859,10 @@
                       </a:endParaRPr>
                     </a:p>
                   </a:txBody>
-                  <a:tcPr marL="50800" marR="50800" marT="50800" marB="50800" anchor="ctr">
+                  <a:tcPr marL="76200" marR="76200" marT="76200" marB="76200" anchor="ctr">
                     <a:lnL w="12700" cap="flat" cmpd="sng" algn="ctr">
                       <a:solidFill>
-                        <a:srgbClr val="284963"/>
+                        <a:srgbClr val="264862"/>
                       </a:solidFill>
                       <a:prstDash val="solid"/>
                       <a:round/>
@@ -5441,7 +5871,7 @@
                     </a:lnL>
                     <a:lnR w="12700" cap="flat" cmpd="sng" algn="ctr">
                       <a:solidFill>
-                        <a:srgbClr val="284963"/>
+                        <a:srgbClr val="264862"/>
                       </a:solidFill>
                       <a:prstDash val="solid"/>
                       <a:round/>
@@ -5450,7 +5880,7 @@
                     </a:lnR>
                     <a:lnT w="12700" cap="flat" cmpd="sng" algn="ctr">
                       <a:solidFill>
-                        <a:srgbClr val="284963"/>
+                        <a:srgbClr val="264862"/>
                       </a:solidFill>
                       <a:prstDash val="solid"/>
                       <a:round/>
@@ -5459,7 +5889,7 @@
                     </a:lnT>
                     <a:lnB w="12700" cap="flat" cmpd="sng" algn="ctr">
                       <a:solidFill>
-                        <a:srgbClr val="284963"/>
+                        <a:srgbClr val="264862"/>
                       </a:solidFill>
                       <a:prstDash val="solid"/>
                       <a:round/>
@@ -5467,7 +5897,7 @@
                       <a:tailEnd type="none" w="med" len="med"/>
                     </a:lnB>
                     <a:solidFill>
-                      <a:srgbClr val="16314A"/>
+                      <a:srgbClr val="0F2133"/>
                     </a:solidFill>
                   </a:tcPr>
                 </a:tc>
@@ -5484,7 +5914,7 @@
                       <a:r>
                         <a:rPr lang="en-US" sz="1150" dirty="0">
                           <a:solidFill>
-                            <a:srgbClr val="E8EEF5"/>
+                            <a:srgbClr val="EAF1F8"/>
                           </a:solidFill>
                           <a:latin typeface="Calibri" pitchFamily="34" charset="0"/>
                           <a:ea typeface="Calibri" pitchFamily="34" charset="-122"/>
@@ -5499,10 +5929,10 @@
                       </a:endParaRPr>
                     </a:p>
                   </a:txBody>
-                  <a:tcPr marL="50800" marR="50800" marT="50800" marB="50800" anchor="ctr">
+                  <a:tcPr marL="76200" marR="76200" marT="76200" marB="76200" anchor="ctr">
                     <a:lnL w="12700" cap="flat" cmpd="sng" algn="ctr">
                       <a:solidFill>
-                        <a:srgbClr val="284963"/>
+                        <a:srgbClr val="264862"/>
                       </a:solidFill>
                       <a:prstDash val="solid"/>
                       <a:round/>
@@ -5511,7 +5941,7 @@
                     </a:lnL>
                     <a:lnR w="12700" cap="flat" cmpd="sng" algn="ctr">
                       <a:solidFill>
-                        <a:srgbClr val="284963"/>
+                        <a:srgbClr val="264862"/>
                       </a:solidFill>
                       <a:prstDash val="solid"/>
                       <a:round/>
@@ -5520,7 +5950,7 @@
                     </a:lnR>
                     <a:lnT w="12700" cap="flat" cmpd="sng" algn="ctr">
                       <a:solidFill>
-                        <a:srgbClr val="284963"/>
+                        <a:srgbClr val="264862"/>
                       </a:solidFill>
                       <a:prstDash val="solid"/>
                       <a:round/>
@@ -5529,7 +5959,7 @@
                     </a:lnT>
                     <a:lnB w="12700" cap="flat" cmpd="sng" algn="ctr">
                       <a:solidFill>
-                        <a:srgbClr val="284963"/>
+                        <a:srgbClr val="264862"/>
                       </a:solidFill>
                       <a:prstDash val="solid"/>
                       <a:round/>
@@ -5537,7 +5967,7 @@
                       <a:tailEnd type="none" w="med" len="med"/>
                     </a:lnB>
                     <a:solidFill>
-                      <a:srgbClr val="12293D"/>
+                      <a:srgbClr val="13283C"/>
                     </a:solidFill>
                   </a:tcPr>
                 </a:tc>
@@ -5552,7 +5982,7 @@
                       <a:r>
                         <a:rPr lang="en-US" sz="1150" dirty="0">
                           <a:solidFill>
-                            <a:srgbClr val="E8EEF5"/>
+                            <a:srgbClr val="EAF1F8"/>
                           </a:solidFill>
                           <a:latin typeface="Calibri" pitchFamily="34" charset="0"/>
                           <a:ea typeface="Calibri" pitchFamily="34" charset="-122"/>
@@ -5567,10 +5997,10 @@
                       </a:endParaRPr>
                     </a:p>
                   </a:txBody>
-                  <a:tcPr marL="50800" marR="50800" marT="50800" marB="50800" anchor="ctr">
+                  <a:tcPr marL="76200" marR="76200" marT="76200" marB="76200" anchor="ctr">
                     <a:lnL w="12700" cap="flat" cmpd="sng" algn="ctr">
                       <a:solidFill>
-                        <a:srgbClr val="284963"/>
+                        <a:srgbClr val="264862"/>
                       </a:solidFill>
                       <a:prstDash val="solid"/>
                       <a:round/>
@@ -5579,7 +6009,7 @@
                     </a:lnL>
                     <a:lnR w="12700" cap="flat" cmpd="sng" algn="ctr">
                       <a:solidFill>
-                        <a:srgbClr val="284963"/>
+                        <a:srgbClr val="264862"/>
                       </a:solidFill>
                       <a:prstDash val="solid"/>
                       <a:round/>
@@ -5588,7 +6018,7 @@
                     </a:lnR>
                     <a:lnT w="12700" cap="flat" cmpd="sng" algn="ctr">
                       <a:solidFill>
-                        <a:srgbClr val="284963"/>
+                        <a:srgbClr val="264862"/>
                       </a:solidFill>
                       <a:prstDash val="solid"/>
                       <a:round/>
@@ -5597,7 +6027,7 @@
                     </a:lnT>
                     <a:lnB w="12700" cap="flat" cmpd="sng" algn="ctr">
                       <a:solidFill>
-                        <a:srgbClr val="284963"/>
+                        <a:srgbClr val="264862"/>
                       </a:solidFill>
                       <a:prstDash val="solid"/>
                       <a:round/>
@@ -5605,7 +6035,7 @@
                       <a:tailEnd type="none" w="med" len="med"/>
                     </a:lnB>
                     <a:solidFill>
-                      <a:srgbClr val="12293D"/>
+                      <a:srgbClr val="13283C"/>
                     </a:solidFill>
                   </a:tcPr>
                 </a:tc>
@@ -5622,7 +6052,7 @@
                       <a:r>
                         <a:rPr lang="en-US" sz="1150" dirty="0">
                           <a:solidFill>
-                            <a:srgbClr val="E8EEF5"/>
+                            <a:srgbClr val="EAF1F8"/>
                           </a:solidFill>
                           <a:latin typeface="Calibri" pitchFamily="34" charset="0"/>
                           <a:ea typeface="Calibri" pitchFamily="34" charset="-122"/>
@@ -5637,10 +6067,10 @@
                       </a:endParaRPr>
                     </a:p>
                   </a:txBody>
-                  <a:tcPr marL="50800" marR="50800" marT="50800" marB="50800" anchor="ctr">
+                  <a:tcPr marL="76200" marR="76200" marT="76200" marB="76200" anchor="ctr">
                     <a:lnL w="12700" cap="flat" cmpd="sng" algn="ctr">
                       <a:solidFill>
-                        <a:srgbClr val="284963"/>
+                        <a:srgbClr val="264862"/>
                       </a:solidFill>
                       <a:prstDash val="solid"/>
                       <a:round/>
@@ -5649,7 +6079,7 @@
                     </a:lnL>
                     <a:lnR w="12700" cap="flat" cmpd="sng" algn="ctr">
                       <a:solidFill>
-                        <a:srgbClr val="284963"/>
+                        <a:srgbClr val="264862"/>
                       </a:solidFill>
                       <a:prstDash val="solid"/>
                       <a:round/>
@@ -5658,7 +6088,7 @@
                     </a:lnR>
                     <a:lnT w="12700" cap="flat" cmpd="sng" algn="ctr">
                       <a:solidFill>
-                        <a:srgbClr val="284963"/>
+                        <a:srgbClr val="264862"/>
                       </a:solidFill>
                       <a:prstDash val="solid"/>
                       <a:round/>
@@ -5667,7 +6097,7 @@
                     </a:lnT>
                     <a:lnB w="12700" cap="flat" cmpd="sng" algn="ctr">
                       <a:solidFill>
-                        <a:srgbClr val="284963"/>
+                        <a:srgbClr val="264862"/>
                       </a:solidFill>
                       <a:prstDash val="solid"/>
                       <a:round/>
@@ -5675,7 +6105,7 @@
                       <a:tailEnd type="none" w="med" len="med"/>
                     </a:lnB>
                     <a:solidFill>
-                      <a:srgbClr val="16314A"/>
+                      <a:srgbClr val="0F2133"/>
                     </a:solidFill>
                   </a:tcPr>
                 </a:tc>
@@ -5690,7 +6120,7 @@
                       <a:r>
                         <a:rPr lang="en-US" sz="1150" dirty="0">
                           <a:solidFill>
-                            <a:srgbClr val="E8EEF5"/>
+                            <a:srgbClr val="EAF1F8"/>
                           </a:solidFill>
                           <a:latin typeface="Calibri" pitchFamily="34" charset="0"/>
                           <a:ea typeface="Calibri" pitchFamily="34" charset="-122"/>
@@ -5705,10 +6135,10 @@
                       </a:endParaRPr>
                     </a:p>
                   </a:txBody>
-                  <a:tcPr marL="50800" marR="50800" marT="50800" marB="50800" anchor="ctr">
+                  <a:tcPr marL="76200" marR="76200" marT="76200" marB="76200" anchor="ctr">
                     <a:lnL w="12700" cap="flat" cmpd="sng" algn="ctr">
                       <a:solidFill>
-                        <a:srgbClr val="284963"/>
+                        <a:srgbClr val="264862"/>
                       </a:solidFill>
                       <a:prstDash val="solid"/>
                       <a:round/>
@@ -5717,7 +6147,7 @@
                     </a:lnL>
                     <a:lnR w="12700" cap="flat" cmpd="sng" algn="ctr">
                       <a:solidFill>
-                        <a:srgbClr val="284963"/>
+                        <a:srgbClr val="264862"/>
                       </a:solidFill>
                       <a:prstDash val="solid"/>
                       <a:round/>
@@ -5726,7 +6156,7 @@
                     </a:lnR>
                     <a:lnT w="12700" cap="flat" cmpd="sng" algn="ctr">
                       <a:solidFill>
-                        <a:srgbClr val="284963"/>
+                        <a:srgbClr val="264862"/>
                       </a:solidFill>
                       <a:prstDash val="solid"/>
                       <a:round/>
@@ -5735,7 +6165,7 @@
                     </a:lnT>
                     <a:lnB w="12700" cap="flat" cmpd="sng" algn="ctr">
                       <a:solidFill>
-                        <a:srgbClr val="284963"/>
+                        <a:srgbClr val="264862"/>
                       </a:solidFill>
                       <a:prstDash val="solid"/>
                       <a:round/>
@@ -5743,7 +6173,7 @@
                       <a:tailEnd type="none" w="med" len="med"/>
                     </a:lnB>
                     <a:solidFill>
-                      <a:srgbClr val="16314A"/>
+                      <a:srgbClr val="0F2133"/>
                     </a:solidFill>
                   </a:tcPr>
                 </a:tc>
@@ -5766,7 +6196,7 @@
     <p:bg>
       <p:bgPr>
         <a:solidFill>
-          <a:srgbClr val="0B1B2B"/>
+          <a:srgbClr val="0A1622"/>
         </a:solidFill>
       </p:bgPr>
     </p:bg>
@@ -5804,6 +6234,13 @@
             <a:srgbClr val="22D3EE"/>
           </a:solidFill>
           <a:ln/>
+          <a:effectLst>
+            <a:outerShdw sx="100000" sy="100000" kx="0" ky="0" algn="bl" rotWithShape="0" blurRad="50800" dist="25400" dir="5400000">
+              <a:srgbClr val="000000">
+                <a:alpha val="40000"/>
+              </a:srgbClr>
+            </a:outerShdw>
+          </a:effectLst>
         </p:spPr>
       </p:sp>
       <p:sp>
@@ -5833,7 +6270,7 @@
             <a:r>
               <a:rPr lang="en-US" sz="2200" b="1" dirty="0">
                 <a:solidFill>
-                  <a:srgbClr val="0B1B2B"/>
+                  <a:srgbClr val="0A1622"/>
                 </a:solidFill>
                 <a:latin typeface="Consolas" pitchFamily="34" charset="0"/>
                 <a:ea typeface="Consolas" pitchFamily="34" charset="-122"/>
@@ -5931,16 +6368,36 @@
         </p:nvSpPr>
         <p:spPr>
           <a:xfrm>
+            <a:off x="1298448" y="1316736"/>
+            <a:ext cx="1005840" cy="32004"/>
+          </a:xfrm>
+          <a:prstGeom prst="rect">
+            <a:avLst/>
+          </a:prstGeom>
+          <a:solidFill>
+            <a:srgbClr val="22D3EE"/>
+          </a:solidFill>
+          <a:ln/>
+        </p:spPr>
+      </p:sp>
+      <p:sp>
+        <p:nvSpPr>
+          <p:cNvPr id="7" name="Shape 5"/>
+          <p:cNvSpPr/>
+          <p:nvPr/>
+        </p:nvSpPr>
+        <p:spPr>
+          <a:xfrm>
             <a:off x="548640" y="2194560"/>
-            <a:ext cx="2615184" cy="777240"/>
+            <a:ext cx="2602992" cy="822960"/>
           </a:xfrm>
           <a:prstGeom prst="roundRect">
             <a:avLst>
-              <a:gd name="adj" fmla="val 8235"/>
+              <a:gd name="adj" fmla="val 8889"/>
             </a:avLst>
           </a:prstGeom>
           <a:solidFill>
-            <a:srgbClr val="12293D"/>
+            <a:srgbClr val="13283C"/>
           </a:solidFill>
           <a:ln w="15875">
             <a:solidFill>
@@ -5948,18 +6405,45 @@
             </a:solidFill>
             <a:prstDash val="solid"/>
           </a:ln>
-        </p:spPr>
-      </p:sp>
-      <p:sp>
-        <p:nvSpPr>
-          <p:cNvPr id="7" name="Text 5"/>
-          <p:cNvSpPr/>
-          <p:nvPr/>
-        </p:nvSpPr>
-        <p:spPr>
-          <a:xfrm>
-            <a:off x="585216" y="2194560"/>
-            <a:ext cx="2542032" cy="777240"/>
+          <a:effectLst>
+            <a:outerShdw sx="100000" sy="100000" kx="0" ky="0" algn="bl" rotWithShape="0" blurRad="50800" dist="25400" dir="5400000">
+              <a:srgbClr val="000000">
+                <a:alpha val="40000"/>
+              </a:srgbClr>
+            </a:outerShdw>
+          </a:effectLst>
+        </p:spPr>
+      </p:sp>
+      <p:sp>
+        <p:nvSpPr>
+          <p:cNvPr id="8" name="Shape 6"/>
+          <p:cNvSpPr/>
+          <p:nvPr/>
+        </p:nvSpPr>
+        <p:spPr>
+          <a:xfrm>
+            <a:off x="658368" y="2340864"/>
+            <a:ext cx="2383536" cy="27432"/>
+          </a:xfrm>
+          <a:prstGeom prst="rect">
+            <a:avLst/>
+          </a:prstGeom>
+          <a:solidFill>
+            <a:srgbClr val="22D3EE"/>
+          </a:solidFill>
+          <a:ln/>
+        </p:spPr>
+      </p:sp>
+      <p:sp>
+        <p:nvSpPr>
+          <p:cNvPr id="9" name="Text 7"/>
+          <p:cNvSpPr/>
+          <p:nvPr/>
+        </p:nvSpPr>
+        <p:spPr>
+          <a:xfrm>
+            <a:off x="585216" y="2304288"/>
+            <a:ext cx="2529840" cy="713232"/>
           </a:xfrm>
           <a:prstGeom prst="rect">
             <a:avLst/>
@@ -5977,7 +6461,7 @@
             <a:r>
               <a:rPr lang="en-US" sz="1150" b="1" dirty="0">
                 <a:solidFill>
-                  <a:srgbClr val="E8EEF5"/>
+                  <a:srgbClr val="EAF1F8"/>
                 </a:solidFill>
                 <a:latin typeface="Calibri" pitchFamily="34" charset="0"/>
                 <a:ea typeface="Calibri" pitchFamily="34" charset="-122"/>
@@ -5991,22 +6475,61 @@
       </p:sp>
       <p:sp>
         <p:nvSpPr>
-          <p:cNvPr id="8" name="Shape 6"/>
-          <p:cNvSpPr/>
-          <p:nvPr/>
-        </p:nvSpPr>
-        <p:spPr>
-          <a:xfrm>
-            <a:off x="3310128" y="2194560"/>
-            <a:ext cx="2615184" cy="777240"/>
+          <p:cNvPr id="10" name="Text 8"/>
+          <p:cNvSpPr/>
+          <p:nvPr/>
+        </p:nvSpPr>
+        <p:spPr>
+          <a:xfrm>
+            <a:off x="3115056" y="2194560"/>
+            <a:ext cx="237744" cy="822960"/>
+          </a:xfrm>
+          <a:prstGeom prst="rect">
+            <a:avLst/>
+          </a:prstGeom>
+          <a:noFill/>
+          <a:ln/>
+        </p:spPr>
+        <p:txBody>
+          <a:bodyPr wrap="square" lIns="0" tIns="0" rIns="0" bIns="0" rtlCol="0" anchor="ctr"/>
+          <a:lstStyle/>
+          <a:p>
+            <a:pPr algn="ctr" indent="0" marL="0">
+              <a:buNone/>
+            </a:pPr>
+            <a:r>
+              <a:rPr lang="en-US" sz="1800" b="1" dirty="0">
+                <a:solidFill>
+                  <a:srgbClr val="22D3EE"/>
+                </a:solidFill>
+                <a:latin typeface="Trebuchet MS" pitchFamily="34" charset="0"/>
+                <a:ea typeface="Trebuchet MS" pitchFamily="34" charset="-122"/>
+                <a:cs typeface="Trebuchet MS" pitchFamily="34" charset="-120"/>
+              </a:rPr>
+              <a:t>›</a:t>
+            </a:r>
+            <a:endParaRPr lang="en-US" sz="1800" dirty="0"/>
+          </a:p>
+        </p:txBody>
+      </p:sp>
+      <p:sp>
+        <p:nvSpPr>
+          <p:cNvPr id="11" name="Shape 9"/>
+          <p:cNvSpPr/>
+          <p:nvPr/>
+        </p:nvSpPr>
+        <p:spPr>
+          <a:xfrm>
+            <a:off x="3316224" y="2194560"/>
+            <a:ext cx="2602992" cy="822960"/>
           </a:xfrm>
           <a:prstGeom prst="roundRect">
             <a:avLst>
-              <a:gd name="adj" fmla="val 8235"/>
+              <a:gd name="adj" fmla="val 8889"/>
             </a:avLst>
           </a:prstGeom>
           <a:solidFill>
-            <a:srgbClr val="12293D"/>
+            <a:srgbClr val="13283C"/>
           </a:solidFill>
           <a:ln w="15875">
             <a:solidFill>
@@ -6014,18 +6537,45 @@
             </a:solidFill>
             <a:prstDash val="solid"/>
           </a:ln>
-        </p:spPr>
-      </p:sp>
-      <p:sp>
-        <p:nvSpPr>
-          <p:cNvPr id="9" name="Text 7"/>
-          <p:cNvSpPr/>
-          <p:nvPr/>
-        </p:nvSpPr>
-        <p:spPr>
-          <a:xfrm>
-            <a:off x="3346704" y="2194560"/>
-            <a:ext cx="2542032" cy="777240"/>
+          <a:effectLst>
+            <a:outerShdw sx="100000" sy="100000" kx="0" ky="0" algn="bl" rotWithShape="0" blurRad="50800" dist="25400" dir="5400000">
+              <a:srgbClr val="000000">
+                <a:alpha val="40000"/>
+              </a:srgbClr>
+            </a:outerShdw>
+          </a:effectLst>
+        </p:spPr>
+      </p:sp>
+      <p:sp>
+        <p:nvSpPr>
+          <p:cNvPr id="12" name="Shape 10"/>
+          <p:cNvSpPr/>
+          <p:nvPr/>
+        </p:nvSpPr>
+        <p:spPr>
+          <a:xfrm>
+            <a:off x="3425952" y="2340864"/>
+            <a:ext cx="2383536" cy="27432"/>
+          </a:xfrm>
+          <a:prstGeom prst="rect">
+            <a:avLst/>
+          </a:prstGeom>
+          <a:solidFill>
+            <a:srgbClr val="22D3EE"/>
+          </a:solidFill>
+          <a:ln/>
+        </p:spPr>
+      </p:sp>
+      <p:sp>
+        <p:nvSpPr>
+          <p:cNvPr id="13" name="Text 11"/>
+          <p:cNvSpPr/>
+          <p:nvPr/>
+        </p:nvSpPr>
+        <p:spPr>
+          <a:xfrm>
+            <a:off x="3352800" y="2304288"/>
+            <a:ext cx="2529840" cy="713232"/>
           </a:xfrm>
           <a:prstGeom prst="rect">
             <a:avLst/>
@@ -6043,7 +6593,7 @@
             <a:r>
               <a:rPr lang="en-US" sz="1150" b="1" dirty="0">
                 <a:solidFill>
-                  <a:srgbClr val="E8EEF5"/>
+                  <a:srgbClr val="EAF1F8"/>
                 </a:solidFill>
                 <a:latin typeface="Calibri" pitchFamily="34" charset="0"/>
                 <a:ea typeface="Calibri" pitchFamily="34" charset="-122"/>
@@ -6057,22 +6607,61 @@
       </p:sp>
       <p:sp>
         <p:nvSpPr>
-          <p:cNvPr id="10" name="Shape 8"/>
-          <p:cNvSpPr/>
-          <p:nvPr/>
-        </p:nvSpPr>
-        <p:spPr>
-          <a:xfrm>
-            <a:off x="6071616" y="2194560"/>
-            <a:ext cx="2615184" cy="777240"/>
+          <p:cNvPr id="14" name="Text 12"/>
+          <p:cNvSpPr/>
+          <p:nvPr/>
+        </p:nvSpPr>
+        <p:spPr>
+          <a:xfrm>
+            <a:off x="5882640" y="2194560"/>
+            <a:ext cx="237744" cy="822960"/>
+          </a:xfrm>
+          <a:prstGeom prst="rect">
+            <a:avLst/>
+          </a:prstGeom>
+          <a:noFill/>
+          <a:ln/>
+        </p:spPr>
+        <p:txBody>
+          <a:bodyPr wrap="square" lIns="0" tIns="0" rIns="0" bIns="0" rtlCol="0" anchor="ctr"/>
+          <a:lstStyle/>
+          <a:p>
+            <a:pPr algn="ctr" indent="0" marL="0">
+              <a:buNone/>
+            </a:pPr>
+            <a:r>
+              <a:rPr lang="en-US" sz="1800" b="1" dirty="0">
+                <a:solidFill>
+                  <a:srgbClr val="22D3EE"/>
+                </a:solidFill>
+                <a:latin typeface="Trebuchet MS" pitchFamily="34" charset="0"/>
+                <a:ea typeface="Trebuchet MS" pitchFamily="34" charset="-122"/>
+                <a:cs typeface="Trebuchet MS" pitchFamily="34" charset="-120"/>
+              </a:rPr>
+              <a:t>›</a:t>
+            </a:r>
+            <a:endParaRPr lang="en-US" sz="1800" dirty="0"/>
+          </a:p>
+        </p:txBody>
+      </p:sp>
+      <p:sp>
+        <p:nvSpPr>
+          <p:cNvPr id="15" name="Shape 13"/>
+          <p:cNvSpPr/>
+          <p:nvPr/>
+        </p:nvSpPr>
+        <p:spPr>
+          <a:xfrm>
+            <a:off x="6083808" y="2194560"/>
+            <a:ext cx="2602992" cy="822960"/>
           </a:xfrm>
           <a:prstGeom prst="roundRect">
             <a:avLst>
-              <a:gd name="adj" fmla="val 8235"/>
+              <a:gd name="adj" fmla="val 8889"/>
             </a:avLst>
           </a:prstGeom>
           <a:solidFill>
-            <a:srgbClr val="12293D"/>
+            <a:srgbClr val="13283C"/>
           </a:solidFill>
           <a:ln w="15875">
             <a:solidFill>
@@ -6080,18 +6669,45 @@
             </a:solidFill>
             <a:prstDash val="solid"/>
           </a:ln>
-        </p:spPr>
-      </p:sp>
-      <p:sp>
-        <p:nvSpPr>
-          <p:cNvPr id="11" name="Text 9"/>
-          <p:cNvSpPr/>
-          <p:nvPr/>
-        </p:nvSpPr>
-        <p:spPr>
-          <a:xfrm>
-            <a:off x="6108192" y="2194560"/>
-            <a:ext cx="2542032" cy="777240"/>
+          <a:effectLst>
+            <a:outerShdw sx="100000" sy="100000" kx="0" ky="0" algn="bl" rotWithShape="0" blurRad="50800" dist="25400" dir="5400000">
+              <a:srgbClr val="000000">
+                <a:alpha val="40000"/>
+              </a:srgbClr>
+            </a:outerShdw>
+          </a:effectLst>
+        </p:spPr>
+      </p:sp>
+      <p:sp>
+        <p:nvSpPr>
+          <p:cNvPr id="16" name="Shape 14"/>
+          <p:cNvSpPr/>
+          <p:nvPr/>
+        </p:nvSpPr>
+        <p:spPr>
+          <a:xfrm>
+            <a:off x="6193536" y="2340864"/>
+            <a:ext cx="2383536" cy="27432"/>
+          </a:xfrm>
+          <a:prstGeom prst="rect">
+            <a:avLst/>
+          </a:prstGeom>
+          <a:solidFill>
+            <a:srgbClr val="22D3EE"/>
+          </a:solidFill>
+          <a:ln/>
+        </p:spPr>
+      </p:sp>
+      <p:sp>
+        <p:nvSpPr>
+          <p:cNvPr id="17" name="Text 15"/>
+          <p:cNvSpPr/>
+          <p:nvPr/>
+        </p:nvSpPr>
+        <p:spPr>
+          <a:xfrm>
+            <a:off x="6120384" y="2304288"/>
+            <a:ext cx="2529840" cy="713232"/>
           </a:xfrm>
           <a:prstGeom prst="rect">
             <a:avLst/>
@@ -6109,7 +6725,7 @@
             <a:r>
               <a:rPr lang="en-US" sz="1150" b="1" dirty="0">
                 <a:solidFill>
-                  <a:srgbClr val="E8EEF5"/>
+                  <a:srgbClr val="EAF1F8"/>
                 </a:solidFill>
                 <a:latin typeface="Calibri" pitchFamily="34" charset="0"/>
                 <a:ea typeface="Calibri" pitchFamily="34" charset="-122"/>
@@ -6123,7 +6739,7 @@
       </p:sp>
       <p:sp>
         <p:nvSpPr>
-          <p:cNvPr id="12" name="Text 10"/>
+          <p:cNvPr id="18" name="Text 16"/>
           <p:cNvSpPr/>
           <p:nvPr/>
         </p:nvSpPr>
@@ -6152,7 +6768,7 @@
             <a:r>
               <a:rPr lang="en-US" sz="1500" dirty="0">
                 <a:solidFill>
-                  <a:srgbClr val="E8EEF5"/>
+                  <a:srgbClr val="EAF1F8"/>
                 </a:solidFill>
                 <a:latin typeface="Calibri" pitchFamily="34" charset="0"/>
                 <a:ea typeface="Calibri" pitchFamily="34" charset="-122"/>
@@ -6173,7 +6789,7 @@
             <a:r>
               <a:rPr lang="en-US" sz="1500" dirty="0">
                 <a:solidFill>
-                  <a:srgbClr val="E8EEF5"/>
+                  <a:srgbClr val="EAF1F8"/>
                 </a:solidFill>
                 <a:latin typeface="Calibri" pitchFamily="34" charset="0"/>
                 <a:ea typeface="Calibri" pitchFamily="34" charset="-122"/>
@@ -6194,7 +6810,7 @@
             <a:r>
               <a:rPr lang="en-US" sz="1500" dirty="0">
                 <a:solidFill>
-                  <a:srgbClr val="E8EEF5"/>
+                  <a:srgbClr val="EAF1F8"/>
                 </a:solidFill>
                 <a:latin typeface="Calibri" pitchFamily="34" charset="0"/>
                 <a:ea typeface="Calibri" pitchFamily="34" charset="-122"/>
@@ -6220,7 +6836,7 @@
     <p:bg>
       <p:bgPr>
         <a:solidFill>
-          <a:srgbClr val="0B1B2B"/>
+          <a:srgbClr val="0A1622"/>
         </a:solidFill>
       </p:bgPr>
     </p:bg>
@@ -6258,6 +6874,13 @@
             <a:srgbClr val="22D3EE"/>
           </a:solidFill>
           <a:ln/>
+          <a:effectLst>
+            <a:outerShdw sx="100000" sy="100000" kx="0" ky="0" algn="bl" rotWithShape="0" blurRad="50800" dist="25400" dir="5400000">
+              <a:srgbClr val="000000">
+                <a:alpha val="40000"/>
+              </a:srgbClr>
+            </a:outerShdw>
+          </a:effectLst>
         </p:spPr>
       </p:sp>
       <p:sp>
@@ -6287,7 +6910,7 @@
             <a:r>
               <a:rPr lang="en-US" sz="2200" b="1" dirty="0">
                 <a:solidFill>
-                  <a:srgbClr val="0B1B2B"/>
+                  <a:srgbClr val="0A1622"/>
                 </a:solidFill>
                 <a:latin typeface="Consolas" pitchFamily="34" charset="0"/>
                 <a:ea typeface="Consolas" pitchFamily="34" charset="-122"/>
@@ -6385,33 +7008,142 @@
         </p:nvSpPr>
         <p:spPr>
           <a:xfrm>
+            <a:off x="1298448" y="1316736"/>
+            <a:ext cx="1005840" cy="32004"/>
+          </a:xfrm>
+          <a:prstGeom prst="rect">
+            <a:avLst/>
+          </a:prstGeom>
+          <a:solidFill>
+            <a:srgbClr val="22D3EE"/>
+          </a:solidFill>
+          <a:ln/>
+        </p:spPr>
+      </p:sp>
+      <p:sp>
+        <p:nvSpPr>
+          <p:cNvPr id="7" name="Shape 5"/>
+          <p:cNvSpPr/>
+          <p:nvPr/>
+        </p:nvSpPr>
+        <p:spPr>
+          <a:xfrm>
             <a:off x="548640" y="1691640"/>
             <a:ext cx="8046720" cy="2834640"/>
           </a:xfrm>
-          <a:prstGeom prst="rect">
-            <a:avLst/>
-          </a:prstGeom>
-          <a:solidFill>
-            <a:srgbClr val="081320"/>
+          <a:prstGeom prst="roundRect">
+            <a:avLst>
+              <a:gd name="adj" fmla="val 1129"/>
+            </a:avLst>
+          </a:prstGeom>
+          <a:solidFill>
+            <a:srgbClr val="060F1A"/>
           </a:solidFill>
           <a:ln w="12700">
             <a:solidFill>
-              <a:srgbClr val="284963"/>
+              <a:srgbClr val="264862"/>
             </a:solidFill>
             <a:prstDash val="solid"/>
           </a:ln>
-        </p:spPr>
-      </p:sp>
-      <p:sp>
-        <p:nvSpPr>
-          <p:cNvPr id="7" name="Text 5"/>
-          <p:cNvSpPr/>
-          <p:nvPr/>
-        </p:nvSpPr>
-        <p:spPr>
-          <a:xfrm>
-            <a:off x="749808" y="1819656"/>
-            <a:ext cx="7644384" cy="2578608"/>
+          <a:effectLst>
+            <a:outerShdw sx="100000" sy="100000" kx="0" ky="0" algn="bl" rotWithShape="0" blurRad="88900" dist="38100" dir="5400000">
+              <a:srgbClr val="000000">
+                <a:alpha val="50000"/>
+              </a:srgbClr>
+            </a:outerShdw>
+          </a:effectLst>
+        </p:spPr>
+      </p:sp>
+      <p:sp>
+        <p:nvSpPr>
+          <p:cNvPr id="8" name="Shape 6"/>
+          <p:cNvSpPr/>
+          <p:nvPr/>
+        </p:nvSpPr>
+        <p:spPr>
+          <a:xfrm>
+            <a:off x="566928" y="1728216"/>
+            <a:ext cx="8010144" cy="274320"/>
+          </a:xfrm>
+          <a:prstGeom prst="rect">
+            <a:avLst/>
+          </a:prstGeom>
+          <a:solidFill>
+            <a:srgbClr val="13283C"/>
+          </a:solidFill>
+          <a:ln/>
+        </p:spPr>
+      </p:sp>
+      <p:sp>
+        <p:nvSpPr>
+          <p:cNvPr id="9" name="Shape 7"/>
+          <p:cNvSpPr/>
+          <p:nvPr/>
+        </p:nvSpPr>
+        <p:spPr>
+          <a:xfrm>
+            <a:off x="713232" y="1801368"/>
+            <a:ext cx="118872" cy="118872"/>
+          </a:xfrm>
+          <a:prstGeom prst="ellipse">
+            <a:avLst/>
+          </a:prstGeom>
+          <a:solidFill>
+            <a:srgbClr val="FB7185"/>
+          </a:solidFill>
+          <a:ln/>
+        </p:spPr>
+      </p:sp>
+      <p:sp>
+        <p:nvSpPr>
+          <p:cNvPr id="10" name="Shape 8"/>
+          <p:cNvSpPr/>
+          <p:nvPr/>
+        </p:nvSpPr>
+        <p:spPr>
+          <a:xfrm>
+            <a:off x="886968" y="1801368"/>
+            <a:ext cx="118872" cy="118872"/>
+          </a:xfrm>
+          <a:prstGeom prst="ellipse">
+            <a:avLst/>
+          </a:prstGeom>
+          <a:solidFill>
+            <a:srgbClr val="FBBF24"/>
+          </a:solidFill>
+          <a:ln/>
+        </p:spPr>
+      </p:sp>
+      <p:sp>
+        <p:nvSpPr>
+          <p:cNvPr id="11" name="Shape 9"/>
+          <p:cNvSpPr/>
+          <p:nvPr/>
+        </p:nvSpPr>
+        <p:spPr>
+          <a:xfrm>
+            <a:off x="1060704" y="1801368"/>
+            <a:ext cx="118872" cy="118872"/>
+          </a:xfrm>
+          <a:prstGeom prst="ellipse">
+            <a:avLst/>
+          </a:prstGeom>
+          <a:solidFill>
+            <a:srgbClr val="34D399"/>
+          </a:solidFill>
+          <a:ln/>
+        </p:spPr>
+      </p:sp>
+      <p:sp>
+        <p:nvSpPr>
+          <p:cNvPr id="12" name="Text 10"/>
+          <p:cNvSpPr/>
+          <p:nvPr/>
+        </p:nvSpPr>
+        <p:spPr>
+          <a:xfrm>
+            <a:off x="768096" y="2112264"/>
+            <a:ext cx="7626096" cy="2286000"/>
           </a:xfrm>
           <a:prstGeom prst="rect">
             <a:avLst/>
@@ -6608,7 +7340,7 @@
     <p:bg>
       <p:bgPr>
         <a:solidFill>
-          <a:srgbClr val="0B1B2B"/>
+          <a:srgbClr val="0A1622"/>
         </a:solidFill>
       </p:bgPr>
     </p:bg>
@@ -6646,6 +7378,13 @@
             <a:srgbClr val="22D3EE"/>
           </a:solidFill>
           <a:ln/>
+          <a:effectLst>
+            <a:outerShdw sx="100000" sy="100000" kx="0" ky="0" algn="bl" rotWithShape="0" blurRad="50800" dist="25400" dir="5400000">
+              <a:srgbClr val="000000">
+                <a:alpha val="40000"/>
+              </a:srgbClr>
+            </a:outerShdw>
+          </a:effectLst>
         </p:spPr>
       </p:sp>
       <p:sp>
@@ -6675,7 +7414,7 @@
             <a:r>
               <a:rPr lang="en-US" sz="2200" b="1" dirty="0">
                 <a:solidFill>
-                  <a:srgbClr val="0B1B2B"/>
+                  <a:srgbClr val="0A1622"/>
                 </a:solidFill>
                 <a:latin typeface="Consolas" pitchFamily="34" charset="0"/>
                 <a:ea typeface="Consolas" pitchFamily="34" charset="-122"/>
@@ -6767,7 +7506,27 @@
       </p:sp>
       <p:sp>
         <p:nvSpPr>
-          <p:cNvPr id="6" name="Text 4"/>
+          <p:cNvPr id="6" name="Shape 4"/>
+          <p:cNvSpPr/>
+          <p:nvPr/>
+        </p:nvSpPr>
+        <p:spPr>
+          <a:xfrm>
+            <a:off x="1298448" y="1316736"/>
+            <a:ext cx="1005840" cy="32004"/>
+          </a:xfrm>
+          <a:prstGeom prst="rect">
+            <a:avLst/>
+          </a:prstGeom>
+          <a:solidFill>
+            <a:srgbClr val="22D3EE"/>
+          </a:solidFill>
+          <a:ln/>
+        </p:spPr>
+      </p:sp>
+      <p:sp>
+        <p:nvSpPr>
+          <p:cNvPr id="7" name="Text 5"/>
           <p:cNvSpPr/>
           <p:nvPr/>
         </p:nvSpPr>
@@ -6796,7 +7555,7 @@
             <a:r>
               <a:rPr lang="en-US" sz="1500" b="1" dirty="0">
                 <a:solidFill>
-                  <a:srgbClr val="E8EEF5"/>
+                  <a:srgbClr val="EAF1F8"/>
                 </a:solidFill>
                 <a:latin typeface="Calibri" pitchFamily="34" charset="0"/>
                 <a:ea typeface="Calibri" pitchFamily="34" charset="-122"/>
@@ -6810,7 +7569,7 @@
       </p:sp>
       <p:sp>
         <p:nvSpPr>
-          <p:cNvPr id="7" name="Shape 5"/>
+          <p:cNvPr id="8" name="Shape 6"/>
           <p:cNvSpPr/>
           <p:nvPr/>
         </p:nvSpPr>
@@ -6819,11 +7578,13 @@
             <a:off x="548640" y="2286000"/>
             <a:ext cx="2542032" cy="2194560"/>
           </a:xfrm>
-          <a:prstGeom prst="rect">
-            <a:avLst/>
-          </a:prstGeom>
-          <a:solidFill>
-            <a:srgbClr val="12293D"/>
+          <a:prstGeom prst="roundRect">
+            <a:avLst>
+              <a:gd name="adj" fmla="val 2083"/>
+            </a:avLst>
+          </a:prstGeom>
+          <a:solidFill>
+            <a:srgbClr val="13283C"/>
           </a:solidFill>
           <a:ln w="15875">
             <a:solidFill>
@@ -6831,18 +7592,25 @@
             </a:solidFill>
             <a:prstDash val="solid"/>
           </a:ln>
-        </p:spPr>
-      </p:sp>
-      <p:sp>
-        <p:nvSpPr>
-          <p:cNvPr id="8" name="Shape 6"/>
-          <p:cNvSpPr/>
-          <p:nvPr/>
-        </p:nvSpPr>
-        <p:spPr>
-          <a:xfrm>
-            <a:off x="548640" y="2286000"/>
-            <a:ext cx="82296" cy="2194560"/>
+          <a:effectLst>
+            <a:outerShdw sx="100000" sy="100000" kx="0" ky="0" algn="bl" rotWithShape="0" blurRad="88900" dist="38100" dir="5400000">
+              <a:srgbClr val="000000">
+                <a:alpha val="50000"/>
+              </a:srgbClr>
+            </a:outerShdw>
+          </a:effectLst>
+        </p:spPr>
+      </p:sp>
+      <p:sp>
+        <p:nvSpPr>
+          <p:cNvPr id="9" name="Shape 7"/>
+          <p:cNvSpPr/>
+          <p:nvPr/>
+        </p:nvSpPr>
+        <p:spPr>
+          <a:xfrm>
+            <a:off x="562356" y="2359152"/>
+            <a:ext cx="73152" cy="2048256"/>
           </a:xfrm>
           <a:prstGeom prst="rect">
             <a:avLst/>
@@ -6855,14 +7623,14 @@
       </p:sp>
       <p:sp>
         <p:nvSpPr>
-          <p:cNvPr id="9" name="Text 7"/>
-          <p:cNvSpPr/>
-          <p:nvPr/>
-        </p:nvSpPr>
-        <p:spPr>
-          <a:xfrm>
-            <a:off x="786384" y="2432304"/>
-            <a:ext cx="2157984" cy="384048"/>
+          <p:cNvPr id="10" name="Text 8"/>
+          <p:cNvSpPr/>
+          <p:nvPr/>
+        </p:nvSpPr>
+        <p:spPr>
+          <a:xfrm>
+            <a:off x="804672" y="2423160"/>
+            <a:ext cx="2139696" cy="384048"/>
           </a:xfrm>
           <a:prstGeom prst="rect">
             <a:avLst/>
@@ -6878,7 +7646,7 @@
               <a:buNone/>
             </a:pPr>
             <a:r>
-              <a:rPr lang="en-US" sz="1500" b="1" dirty="0">
+              <a:rPr lang="en-US" sz="1500" b="1" spc="50" kern="0" dirty="0">
                 <a:solidFill>
                   <a:srgbClr val="22D3EE"/>
                 </a:solidFill>
@@ -6894,14 +7662,34 @@
       </p:sp>
       <p:sp>
         <p:nvSpPr>
-          <p:cNvPr id="10" name="Text 8"/>
-          <p:cNvSpPr/>
-          <p:nvPr/>
-        </p:nvSpPr>
-        <p:spPr>
-          <a:xfrm>
-            <a:off x="786384" y="2871216"/>
-            <a:ext cx="2084832" cy="1463040"/>
+          <p:cNvPr id="11" name="Shape 9"/>
+          <p:cNvSpPr/>
+          <p:nvPr/>
+        </p:nvSpPr>
+        <p:spPr>
+          <a:xfrm>
+            <a:off x="804672" y="2816352"/>
+            <a:ext cx="2029968" cy="16459"/>
+          </a:xfrm>
+          <a:prstGeom prst="rect">
+            <a:avLst/>
+          </a:prstGeom>
+          <a:solidFill>
+            <a:srgbClr val="264862"/>
+          </a:solidFill>
+          <a:ln/>
+        </p:spPr>
+      </p:sp>
+      <p:sp>
+        <p:nvSpPr>
+          <p:cNvPr id="12" name="Text 10"/>
+          <p:cNvSpPr/>
+          <p:nvPr/>
+        </p:nvSpPr>
+        <p:spPr>
+          <a:xfrm>
+            <a:off x="804672" y="2926080"/>
+            <a:ext cx="2066544" cy="1408176"/>
           </a:xfrm>
           <a:prstGeom prst="rect">
             <a:avLst/>
@@ -6923,7 +7711,7 @@
             <a:r>
               <a:rPr lang="en-US" sz="1200" dirty="0">
                 <a:solidFill>
-                  <a:srgbClr val="E8EEF5"/>
+                  <a:srgbClr val="EAF1F8"/>
                 </a:solidFill>
                 <a:latin typeface="Calibri" pitchFamily="34" charset="0"/>
                 <a:ea typeface="Calibri" pitchFamily="34" charset="-122"/>
@@ -6944,7 +7732,7 @@
             <a:r>
               <a:rPr lang="en-US" sz="1200" dirty="0">
                 <a:solidFill>
-                  <a:srgbClr val="E8EEF5"/>
+                  <a:srgbClr val="EAF1F8"/>
                 </a:solidFill>
                 <a:latin typeface="Calibri" pitchFamily="34" charset="0"/>
                 <a:ea typeface="Calibri" pitchFamily="34" charset="-122"/>
@@ -6965,7 +7753,7 @@
             <a:r>
               <a:rPr lang="en-US" sz="1200" dirty="0">
                 <a:solidFill>
-                  <a:srgbClr val="E8EEF5"/>
+                  <a:srgbClr val="EAF1F8"/>
                 </a:solidFill>
                 <a:latin typeface="Calibri" pitchFamily="34" charset="0"/>
                 <a:ea typeface="Calibri" pitchFamily="34" charset="-122"/>
@@ -6979,7 +7767,7 @@
       </p:sp>
       <p:sp>
         <p:nvSpPr>
-          <p:cNvPr id="11" name="Shape 9"/>
+          <p:cNvPr id="13" name="Shape 11"/>
           <p:cNvSpPr/>
           <p:nvPr/>
         </p:nvSpPr>
@@ -6988,11 +7776,13 @@
             <a:off x="3200400" y="2286000"/>
             <a:ext cx="2542032" cy="2194560"/>
           </a:xfrm>
-          <a:prstGeom prst="rect">
-            <a:avLst/>
-          </a:prstGeom>
-          <a:solidFill>
-            <a:srgbClr val="12293D"/>
+          <a:prstGeom prst="roundRect">
+            <a:avLst>
+              <a:gd name="adj" fmla="val 2083"/>
+            </a:avLst>
+          </a:prstGeom>
+          <a:solidFill>
+            <a:srgbClr val="13283C"/>
           </a:solidFill>
           <a:ln w="15875">
             <a:solidFill>
@@ -7000,18 +7790,25 @@
             </a:solidFill>
             <a:prstDash val="solid"/>
           </a:ln>
-        </p:spPr>
-      </p:sp>
-      <p:sp>
-        <p:nvSpPr>
-          <p:cNvPr id="12" name="Shape 10"/>
-          <p:cNvSpPr/>
-          <p:nvPr/>
-        </p:nvSpPr>
-        <p:spPr>
-          <a:xfrm>
-            <a:off x="3200400" y="2286000"/>
-            <a:ext cx="82296" cy="2194560"/>
+          <a:effectLst>
+            <a:outerShdw sx="100000" sy="100000" kx="0" ky="0" algn="bl" rotWithShape="0" blurRad="88900" dist="38100" dir="5400000">
+              <a:srgbClr val="000000">
+                <a:alpha val="50000"/>
+              </a:srgbClr>
+            </a:outerShdw>
+          </a:effectLst>
+        </p:spPr>
+      </p:sp>
+      <p:sp>
+        <p:nvSpPr>
+          <p:cNvPr id="14" name="Shape 12"/>
+          <p:cNvSpPr/>
+          <p:nvPr/>
+        </p:nvSpPr>
+        <p:spPr>
+          <a:xfrm>
+            <a:off x="3214116" y="2359152"/>
+            <a:ext cx="73152" cy="2048256"/>
           </a:xfrm>
           <a:prstGeom prst="rect">
             <a:avLst/>
@@ -7024,14 +7821,14 @@
       </p:sp>
       <p:sp>
         <p:nvSpPr>
-          <p:cNvPr id="13" name="Text 11"/>
-          <p:cNvSpPr/>
-          <p:nvPr/>
-        </p:nvSpPr>
-        <p:spPr>
-          <a:xfrm>
-            <a:off x="3438144" y="2432304"/>
-            <a:ext cx="2157984" cy="384048"/>
+          <p:cNvPr id="15" name="Text 13"/>
+          <p:cNvSpPr/>
+          <p:nvPr/>
+        </p:nvSpPr>
+        <p:spPr>
+          <a:xfrm>
+            <a:off x="3456432" y="2423160"/>
+            <a:ext cx="2139696" cy="384048"/>
           </a:xfrm>
           <a:prstGeom prst="rect">
             <a:avLst/>
@@ -7047,7 +7844,7 @@
               <a:buNone/>
             </a:pPr>
             <a:r>
-              <a:rPr lang="en-US" sz="1500" b="1" dirty="0">
+              <a:rPr lang="en-US" sz="1500" b="1" spc="50" kern="0" dirty="0">
                 <a:solidFill>
                   <a:srgbClr val="34D399"/>
                 </a:solidFill>
@@ -7063,14 +7860,34 @@
       </p:sp>
       <p:sp>
         <p:nvSpPr>
-          <p:cNvPr id="14" name="Text 12"/>
-          <p:cNvSpPr/>
-          <p:nvPr/>
-        </p:nvSpPr>
-        <p:spPr>
-          <a:xfrm>
-            <a:off x="3438144" y="2871216"/>
-            <a:ext cx="2084832" cy="1463040"/>
+          <p:cNvPr id="16" name="Shape 14"/>
+          <p:cNvSpPr/>
+          <p:nvPr/>
+        </p:nvSpPr>
+        <p:spPr>
+          <a:xfrm>
+            <a:off x="3456432" y="2816352"/>
+            <a:ext cx="2029968" cy="16459"/>
+          </a:xfrm>
+          <a:prstGeom prst="rect">
+            <a:avLst/>
+          </a:prstGeom>
+          <a:solidFill>
+            <a:srgbClr val="264862"/>
+          </a:solidFill>
+          <a:ln/>
+        </p:spPr>
+      </p:sp>
+      <p:sp>
+        <p:nvSpPr>
+          <p:cNvPr id="17" name="Text 15"/>
+          <p:cNvSpPr/>
+          <p:nvPr/>
+        </p:nvSpPr>
+        <p:spPr>
+          <a:xfrm>
+            <a:off x="3456432" y="2926080"/>
+            <a:ext cx="2066544" cy="1408176"/>
           </a:xfrm>
           <a:prstGeom prst="rect">
             <a:avLst/>
@@ -7092,7 +7909,7 @@
             <a:r>
               <a:rPr lang="en-US" sz="1200" dirty="0">
                 <a:solidFill>
-                  <a:srgbClr val="E8EEF5"/>
+                  <a:srgbClr val="EAF1F8"/>
                 </a:solidFill>
                 <a:latin typeface="Calibri" pitchFamily="34" charset="0"/>
                 <a:ea typeface="Calibri" pitchFamily="34" charset="-122"/>
@@ -7113,7 +7930,7 @@
             <a:r>
               <a:rPr lang="en-US" sz="1200" dirty="0">
                 <a:solidFill>
-                  <a:srgbClr val="E8EEF5"/>
+                  <a:srgbClr val="EAF1F8"/>
                 </a:solidFill>
                 <a:latin typeface="Calibri" pitchFamily="34" charset="0"/>
                 <a:ea typeface="Calibri" pitchFamily="34" charset="-122"/>
@@ -7134,7 +7951,7 @@
             <a:r>
               <a:rPr lang="en-US" sz="1200" dirty="0">
                 <a:solidFill>
-                  <a:srgbClr val="E8EEF5"/>
+                  <a:srgbClr val="EAF1F8"/>
                 </a:solidFill>
                 <a:latin typeface="Calibri" pitchFamily="34" charset="0"/>
                 <a:ea typeface="Calibri" pitchFamily="34" charset="-122"/>
@@ -7148,7 +7965,7 @@
       </p:sp>
       <p:sp>
         <p:nvSpPr>
-          <p:cNvPr id="15" name="Shape 13"/>
+          <p:cNvPr id="18" name="Shape 16"/>
           <p:cNvSpPr/>
           <p:nvPr/>
         </p:nvSpPr>
@@ -7157,11 +7974,13 @@
             <a:off x="5669280" y="2286000"/>
             <a:ext cx="2542032" cy="2194560"/>
           </a:xfrm>
-          <a:prstGeom prst="rect">
-            <a:avLst/>
-          </a:prstGeom>
-          <a:solidFill>
-            <a:srgbClr val="12293D"/>
+          <a:prstGeom prst="roundRect">
+            <a:avLst>
+              <a:gd name="adj" fmla="val 2083"/>
+            </a:avLst>
+          </a:prstGeom>
+          <a:solidFill>
+            <a:srgbClr val="13283C"/>
           </a:solidFill>
           <a:ln w="15875">
             <a:solidFill>
@@ -7169,18 +7988,25 @@
             </a:solidFill>
             <a:prstDash val="solid"/>
           </a:ln>
-        </p:spPr>
-      </p:sp>
-      <p:sp>
-        <p:nvSpPr>
-          <p:cNvPr id="16" name="Shape 14"/>
-          <p:cNvSpPr/>
-          <p:nvPr/>
-        </p:nvSpPr>
-        <p:spPr>
-          <a:xfrm>
-            <a:off x="5669280" y="2286000"/>
-            <a:ext cx="82296" cy="2194560"/>
+          <a:effectLst>
+            <a:outerShdw sx="100000" sy="100000" kx="0" ky="0" algn="bl" rotWithShape="0" blurRad="88900" dist="38100" dir="5400000">
+              <a:srgbClr val="000000">
+                <a:alpha val="50000"/>
+              </a:srgbClr>
+            </a:outerShdw>
+          </a:effectLst>
+        </p:spPr>
+      </p:sp>
+      <p:sp>
+        <p:nvSpPr>
+          <p:cNvPr id="19" name="Shape 17"/>
+          <p:cNvSpPr/>
+          <p:nvPr/>
+        </p:nvSpPr>
+        <p:spPr>
+          <a:xfrm>
+            <a:off x="5682996" y="2359152"/>
+            <a:ext cx="73152" cy="2048256"/>
           </a:xfrm>
           <a:prstGeom prst="rect">
             <a:avLst/>
@@ -7193,14 +8019,14 @@
       </p:sp>
       <p:sp>
         <p:nvSpPr>
-          <p:cNvPr id="17" name="Text 15"/>
-          <p:cNvSpPr/>
-          <p:nvPr/>
-        </p:nvSpPr>
-        <p:spPr>
-          <a:xfrm>
-            <a:off x="5907024" y="2432304"/>
-            <a:ext cx="2157984" cy="384048"/>
+          <p:cNvPr id="20" name="Text 18"/>
+          <p:cNvSpPr/>
+          <p:nvPr/>
+        </p:nvSpPr>
+        <p:spPr>
+          <a:xfrm>
+            <a:off x="5925312" y="2423160"/>
+            <a:ext cx="2139696" cy="384048"/>
           </a:xfrm>
           <a:prstGeom prst="rect">
             <a:avLst/>
@@ -7216,7 +8042,7 @@
               <a:buNone/>
             </a:pPr>
             <a:r>
-              <a:rPr lang="en-US" sz="1500" b="1" dirty="0">
+              <a:rPr lang="en-US" sz="1500" b="1" spc="50" kern="0" dirty="0">
                 <a:solidFill>
                   <a:srgbClr val="FBBF24"/>
                 </a:solidFill>
@@ -7232,14 +8058,34 @@
       </p:sp>
       <p:sp>
         <p:nvSpPr>
-          <p:cNvPr id="18" name="Text 16"/>
-          <p:cNvSpPr/>
-          <p:nvPr/>
-        </p:nvSpPr>
-        <p:spPr>
-          <a:xfrm>
-            <a:off x="5907024" y="2871216"/>
-            <a:ext cx="2084832" cy="1463040"/>
+          <p:cNvPr id="21" name="Shape 19"/>
+          <p:cNvSpPr/>
+          <p:nvPr/>
+        </p:nvSpPr>
+        <p:spPr>
+          <a:xfrm>
+            <a:off x="5925312" y="2816352"/>
+            <a:ext cx="2029968" cy="16459"/>
+          </a:xfrm>
+          <a:prstGeom prst="rect">
+            <a:avLst/>
+          </a:prstGeom>
+          <a:solidFill>
+            <a:srgbClr val="264862"/>
+          </a:solidFill>
+          <a:ln/>
+        </p:spPr>
+      </p:sp>
+      <p:sp>
+        <p:nvSpPr>
+          <p:cNvPr id="22" name="Text 20"/>
+          <p:cNvSpPr/>
+          <p:nvPr/>
+        </p:nvSpPr>
+        <p:spPr>
+          <a:xfrm>
+            <a:off x="5925312" y="2926080"/>
+            <a:ext cx="2066544" cy="1408176"/>
           </a:xfrm>
           <a:prstGeom prst="rect">
             <a:avLst/>
@@ -7261,7 +8107,7 @@
             <a:r>
               <a:rPr lang="en-US" sz="1200" dirty="0">
                 <a:solidFill>
-                  <a:srgbClr val="E8EEF5"/>
+                  <a:srgbClr val="EAF1F8"/>
                 </a:solidFill>
                 <a:latin typeface="Calibri" pitchFamily="34" charset="0"/>
                 <a:ea typeface="Calibri" pitchFamily="34" charset="-122"/>
@@ -7282,7 +8128,7 @@
             <a:r>
               <a:rPr lang="en-US" sz="1200" dirty="0">
                 <a:solidFill>
-                  <a:srgbClr val="E8EEF5"/>
+                  <a:srgbClr val="EAF1F8"/>
                 </a:solidFill>
                 <a:latin typeface="Calibri" pitchFamily="34" charset="0"/>
                 <a:ea typeface="Calibri" pitchFamily="34" charset="-122"/>
@@ -7303,7 +8149,7 @@
             <a:r>
               <a:rPr lang="en-US" sz="1200" dirty="0">
                 <a:solidFill>
-                  <a:srgbClr val="E8EEF5"/>
+                  <a:srgbClr val="EAF1F8"/>
                 </a:solidFill>
                 <a:latin typeface="Calibri" pitchFamily="34" charset="0"/>
                 <a:ea typeface="Calibri" pitchFamily="34" charset="-122"/>
@@ -7329,7 +8175,7 @@
     <p:bg>
       <p:bgPr>
         <a:solidFill>
-          <a:srgbClr val="0B1B2B"/>
+          <a:srgbClr val="0A1622"/>
         </a:solidFill>
       </p:bgPr>
     </p:bg>
@@ -7367,6 +8213,13 @@
             <a:srgbClr val="22D3EE"/>
           </a:solidFill>
           <a:ln/>
+          <a:effectLst>
+            <a:outerShdw sx="100000" sy="100000" kx="0" ky="0" algn="bl" rotWithShape="0" blurRad="50800" dist="25400" dir="5400000">
+              <a:srgbClr val="000000">
+                <a:alpha val="40000"/>
+              </a:srgbClr>
+            </a:outerShdw>
+          </a:effectLst>
         </p:spPr>
       </p:sp>
       <p:sp>
@@ -7396,7 +8249,7 @@
             <a:r>
               <a:rPr lang="en-US" sz="2200" b="1" dirty="0">
                 <a:solidFill>
-                  <a:srgbClr val="0B1B2B"/>
+                  <a:srgbClr val="0A1622"/>
                 </a:solidFill>
                 <a:latin typeface="Consolas" pitchFamily="34" charset="0"/>
                 <a:ea typeface="Consolas" pitchFamily="34" charset="-122"/>
@@ -7494,14 +8347,36 @@
         </p:nvSpPr>
         <p:spPr>
           <a:xfrm>
+            <a:off x="1298448" y="1316736"/>
+            <a:ext cx="1005840" cy="32004"/>
+          </a:xfrm>
+          <a:prstGeom prst="rect">
+            <a:avLst/>
+          </a:prstGeom>
+          <a:solidFill>
+            <a:srgbClr val="22D3EE"/>
+          </a:solidFill>
+          <a:ln/>
+        </p:spPr>
+      </p:sp>
+      <p:sp>
+        <p:nvSpPr>
+          <p:cNvPr id="7" name="Shape 5"/>
+          <p:cNvSpPr/>
+          <p:nvPr/>
+        </p:nvSpPr>
+        <p:spPr>
+          <a:xfrm>
             <a:off x="548640" y="1691640"/>
             <a:ext cx="3886200" cy="2743200"/>
           </a:xfrm>
-          <a:prstGeom prst="rect">
-            <a:avLst/>
-          </a:prstGeom>
-          <a:solidFill>
-            <a:srgbClr val="12293D"/>
+          <a:prstGeom prst="roundRect">
+            <a:avLst>
+              <a:gd name="adj" fmla="val 1667"/>
+            </a:avLst>
+          </a:prstGeom>
+          <a:solidFill>
+            <a:srgbClr val="13283C"/>
           </a:solidFill>
           <a:ln w="15875">
             <a:solidFill>
@@ -7509,18 +8384,25 @@
             </a:solidFill>
             <a:prstDash val="solid"/>
           </a:ln>
-        </p:spPr>
-      </p:sp>
-      <p:sp>
-        <p:nvSpPr>
-          <p:cNvPr id="7" name="Shape 5"/>
-          <p:cNvSpPr/>
-          <p:nvPr/>
-        </p:nvSpPr>
-        <p:spPr>
-          <a:xfrm>
-            <a:off x="548640" y="1691640"/>
-            <a:ext cx="82296" cy="2743200"/>
+          <a:effectLst>
+            <a:outerShdw sx="100000" sy="100000" kx="0" ky="0" algn="bl" rotWithShape="0" blurRad="88900" dist="38100" dir="5400000">
+              <a:srgbClr val="000000">
+                <a:alpha val="50000"/>
+              </a:srgbClr>
+            </a:outerShdw>
+          </a:effectLst>
+        </p:spPr>
+      </p:sp>
+      <p:sp>
+        <p:nvSpPr>
+          <p:cNvPr id="8" name="Shape 6"/>
+          <p:cNvSpPr/>
+          <p:nvPr/>
+        </p:nvSpPr>
+        <p:spPr>
+          <a:xfrm>
+            <a:off x="562356" y="1764792"/>
+            <a:ext cx="73152" cy="2596896"/>
           </a:xfrm>
           <a:prstGeom prst="rect">
             <a:avLst/>
@@ -7533,14 +8415,14 @@
       </p:sp>
       <p:sp>
         <p:nvSpPr>
-          <p:cNvPr id="8" name="Text 6"/>
-          <p:cNvSpPr/>
-          <p:nvPr/>
-        </p:nvSpPr>
-        <p:spPr>
-          <a:xfrm>
-            <a:off x="786384" y="1837944"/>
-            <a:ext cx="3502152" cy="384048"/>
+          <p:cNvPr id="9" name="Text 7"/>
+          <p:cNvSpPr/>
+          <p:nvPr/>
+        </p:nvSpPr>
+        <p:spPr>
+          <a:xfrm>
+            <a:off x="804672" y="1828800"/>
+            <a:ext cx="3483864" cy="384048"/>
           </a:xfrm>
           <a:prstGeom prst="rect">
             <a:avLst/>
@@ -7556,7 +8438,7 @@
               <a:buNone/>
             </a:pPr>
             <a:r>
-              <a:rPr lang="en-US" sz="1500" b="1" dirty="0">
+              <a:rPr lang="en-US" sz="1500" b="1" spc="50" kern="0" dirty="0">
                 <a:solidFill>
                   <a:srgbClr val="22D3EE"/>
                 </a:solidFill>
@@ -7572,14 +8454,34 @@
       </p:sp>
       <p:sp>
         <p:nvSpPr>
-          <p:cNvPr id="9" name="Text 7"/>
-          <p:cNvSpPr/>
-          <p:nvPr/>
-        </p:nvSpPr>
-        <p:spPr>
-          <a:xfrm>
-            <a:off x="786384" y="2276856"/>
-            <a:ext cx="3429000" cy="2011680"/>
+          <p:cNvPr id="10" name="Shape 8"/>
+          <p:cNvSpPr/>
+          <p:nvPr/>
+        </p:nvSpPr>
+        <p:spPr>
+          <a:xfrm>
+            <a:off x="804672" y="2221992"/>
+            <a:ext cx="3374136" cy="16459"/>
+          </a:xfrm>
+          <a:prstGeom prst="rect">
+            <a:avLst/>
+          </a:prstGeom>
+          <a:solidFill>
+            <a:srgbClr val="264862"/>
+          </a:solidFill>
+          <a:ln/>
+        </p:spPr>
+      </p:sp>
+      <p:sp>
+        <p:nvSpPr>
+          <p:cNvPr id="11" name="Text 9"/>
+          <p:cNvSpPr/>
+          <p:nvPr/>
+        </p:nvSpPr>
+        <p:spPr>
+          <a:xfrm>
+            <a:off x="804672" y="2331720"/>
+            <a:ext cx="3410712" cy="1956816"/>
           </a:xfrm>
           <a:prstGeom prst="rect">
             <a:avLst/>
@@ -7601,7 +8503,7 @@
             <a:r>
               <a:rPr lang="en-US" sz="1250" dirty="0">
                 <a:solidFill>
-                  <a:srgbClr val="E8EEF5"/>
+                  <a:srgbClr val="EAF1F8"/>
                 </a:solidFill>
                 <a:latin typeface="Calibri" pitchFamily="34" charset="0"/>
                 <a:ea typeface="Calibri" pitchFamily="34" charset="-122"/>
@@ -7622,7 +8524,7 @@
             <a:r>
               <a:rPr lang="en-US" sz="1250" dirty="0">
                 <a:solidFill>
-                  <a:srgbClr val="E8EEF5"/>
+                  <a:srgbClr val="EAF1F8"/>
                 </a:solidFill>
                 <a:latin typeface="Calibri" pitchFamily="34" charset="0"/>
                 <a:ea typeface="Calibri" pitchFamily="34" charset="-122"/>
@@ -7643,7 +8545,7 @@
             <a:r>
               <a:rPr lang="en-US" sz="1250" dirty="0">
                 <a:solidFill>
-                  <a:srgbClr val="E8EEF5"/>
+                  <a:srgbClr val="EAF1F8"/>
                 </a:solidFill>
                 <a:latin typeface="Calibri" pitchFamily="34" charset="0"/>
                 <a:ea typeface="Calibri" pitchFamily="34" charset="-122"/>
@@ -7664,7 +8566,7 @@
             <a:r>
               <a:rPr lang="en-US" sz="1250" dirty="0">
                 <a:solidFill>
-                  <a:srgbClr val="E8EEF5"/>
+                  <a:srgbClr val="EAF1F8"/>
                 </a:solidFill>
                 <a:latin typeface="Calibri" pitchFamily="34" charset="0"/>
                 <a:ea typeface="Calibri" pitchFamily="34" charset="-122"/>
@@ -7678,7 +8580,7 @@
       </p:sp>
       <p:sp>
         <p:nvSpPr>
-          <p:cNvPr id="10" name="Shape 8"/>
+          <p:cNvPr id="12" name="Shape 10"/>
           <p:cNvSpPr/>
           <p:nvPr/>
         </p:nvSpPr>
@@ -7687,11 +8589,13 @@
             <a:off x="4663440" y="1691640"/>
             <a:ext cx="3931920" cy="2743200"/>
           </a:xfrm>
-          <a:prstGeom prst="rect">
-            <a:avLst/>
-          </a:prstGeom>
-          <a:solidFill>
-            <a:srgbClr val="12293D"/>
+          <a:prstGeom prst="roundRect">
+            <a:avLst>
+              <a:gd name="adj" fmla="val 1667"/>
+            </a:avLst>
+          </a:prstGeom>
+          <a:solidFill>
+            <a:srgbClr val="13283C"/>
           </a:solidFill>
           <a:ln w="15875">
             <a:solidFill>
@@ -7699,18 +8603,25 @@
             </a:solidFill>
             <a:prstDash val="solid"/>
           </a:ln>
-        </p:spPr>
-      </p:sp>
-      <p:sp>
-        <p:nvSpPr>
-          <p:cNvPr id="11" name="Shape 9"/>
-          <p:cNvSpPr/>
-          <p:nvPr/>
-        </p:nvSpPr>
-        <p:spPr>
-          <a:xfrm>
-            <a:off x="4663440" y="1691640"/>
-            <a:ext cx="82296" cy="2743200"/>
+          <a:effectLst>
+            <a:outerShdw sx="100000" sy="100000" kx="0" ky="0" algn="bl" rotWithShape="0" blurRad="88900" dist="38100" dir="5400000">
+              <a:srgbClr val="000000">
+                <a:alpha val="50000"/>
+              </a:srgbClr>
+            </a:outerShdw>
+          </a:effectLst>
+        </p:spPr>
+      </p:sp>
+      <p:sp>
+        <p:nvSpPr>
+          <p:cNvPr id="13" name="Shape 11"/>
+          <p:cNvSpPr/>
+          <p:nvPr/>
+        </p:nvSpPr>
+        <p:spPr>
+          <a:xfrm>
+            <a:off x="4677156" y="1764792"/>
+            <a:ext cx="73152" cy="2596896"/>
           </a:xfrm>
           <a:prstGeom prst="rect">
             <a:avLst/>
@@ -7723,14 +8634,14 @@
       </p:sp>
       <p:sp>
         <p:nvSpPr>
-          <p:cNvPr id="12" name="Text 10"/>
-          <p:cNvSpPr/>
-          <p:nvPr/>
-        </p:nvSpPr>
-        <p:spPr>
-          <a:xfrm>
-            <a:off x="4901184" y="1837944"/>
-            <a:ext cx="3547872" cy="384048"/>
+          <p:cNvPr id="14" name="Text 12"/>
+          <p:cNvSpPr/>
+          <p:nvPr/>
+        </p:nvSpPr>
+        <p:spPr>
+          <a:xfrm>
+            <a:off x="4919472" y="1828800"/>
+            <a:ext cx="3529584" cy="384048"/>
           </a:xfrm>
           <a:prstGeom prst="rect">
             <a:avLst/>
@@ -7746,7 +8657,7 @@
               <a:buNone/>
             </a:pPr>
             <a:r>
-              <a:rPr lang="en-US" sz="1500" b="1" dirty="0">
+              <a:rPr lang="en-US" sz="1500" b="1" spc="50" kern="0" dirty="0">
                 <a:solidFill>
                   <a:srgbClr val="FB7185"/>
                 </a:solidFill>
@@ -7762,14 +8673,34 @@
       </p:sp>
       <p:sp>
         <p:nvSpPr>
-          <p:cNvPr id="13" name="Text 11"/>
-          <p:cNvSpPr/>
-          <p:nvPr/>
-        </p:nvSpPr>
-        <p:spPr>
-          <a:xfrm>
-            <a:off x="4901184" y="2276856"/>
-            <a:ext cx="3474720" cy="2011680"/>
+          <p:cNvPr id="15" name="Shape 13"/>
+          <p:cNvSpPr/>
+          <p:nvPr/>
+        </p:nvSpPr>
+        <p:spPr>
+          <a:xfrm>
+            <a:off x="4919472" y="2221992"/>
+            <a:ext cx="3419856" cy="16459"/>
+          </a:xfrm>
+          <a:prstGeom prst="rect">
+            <a:avLst/>
+          </a:prstGeom>
+          <a:solidFill>
+            <a:srgbClr val="264862"/>
+          </a:solidFill>
+          <a:ln/>
+        </p:spPr>
+      </p:sp>
+      <p:sp>
+        <p:nvSpPr>
+          <p:cNvPr id="16" name="Text 14"/>
+          <p:cNvSpPr/>
+          <p:nvPr/>
+        </p:nvSpPr>
+        <p:spPr>
+          <a:xfrm>
+            <a:off x="4919472" y="2331720"/>
+            <a:ext cx="3456432" cy="1956816"/>
           </a:xfrm>
           <a:prstGeom prst="rect">
             <a:avLst/>
@@ -7791,7 +8722,7 @@
             <a:r>
               <a:rPr lang="en-US" sz="1250" dirty="0">
                 <a:solidFill>
-                  <a:srgbClr val="E8EEF5"/>
+                  <a:srgbClr val="EAF1F8"/>
                 </a:solidFill>
                 <a:latin typeface="Calibri" pitchFamily="34" charset="0"/>
                 <a:ea typeface="Calibri" pitchFamily="34" charset="-122"/>
@@ -7812,7 +8743,7 @@
             <a:r>
               <a:rPr lang="en-US" sz="1250" dirty="0">
                 <a:solidFill>
-                  <a:srgbClr val="E8EEF5"/>
+                  <a:srgbClr val="EAF1F8"/>
                 </a:solidFill>
                 <a:latin typeface="Calibri" pitchFamily="34" charset="0"/>
                 <a:ea typeface="Calibri" pitchFamily="34" charset="-122"/>
@@ -7833,7 +8764,7 @@
             <a:r>
               <a:rPr lang="en-US" sz="1250" dirty="0">
                 <a:solidFill>
-                  <a:srgbClr val="E8EEF5"/>
+                  <a:srgbClr val="EAF1F8"/>
                 </a:solidFill>
                 <a:latin typeface="Calibri" pitchFamily="34" charset="0"/>
                 <a:ea typeface="Calibri" pitchFamily="34" charset="-122"/>
@@ -7854,7 +8785,7 @@
             <a:r>
               <a:rPr lang="en-US" sz="1250" dirty="0">
                 <a:solidFill>
-                  <a:srgbClr val="E8EEF5"/>
+                  <a:srgbClr val="EAF1F8"/>
                 </a:solidFill>
                 <a:latin typeface="Calibri" pitchFamily="34" charset="0"/>
                 <a:ea typeface="Calibri" pitchFamily="34" charset="-122"/>
@@ -7880,7 +8811,7 @@
     <p:bg>
       <p:bgPr>
         <a:solidFill>
-          <a:srgbClr val="0B1B2B"/>
+          <a:srgbClr val="0A1622"/>
         </a:solidFill>
       </p:bgPr>
     </p:bg>
@@ -7918,6 +8849,13 @@
             <a:srgbClr val="22D3EE"/>
           </a:solidFill>
           <a:ln/>
+          <a:effectLst>
+            <a:outerShdw sx="100000" sy="100000" kx="0" ky="0" algn="bl" rotWithShape="0" blurRad="50800" dist="25400" dir="5400000">
+              <a:srgbClr val="000000">
+                <a:alpha val="40000"/>
+              </a:srgbClr>
+            </a:outerShdw>
+          </a:effectLst>
         </p:spPr>
       </p:sp>
       <p:sp>
@@ -7947,7 +8885,7 @@
             <a:r>
               <a:rPr lang="en-US" sz="2200" b="1" dirty="0">
                 <a:solidFill>
-                  <a:srgbClr val="0B1B2B"/>
+                  <a:srgbClr val="0A1622"/>
                 </a:solidFill>
                 <a:latin typeface="Consolas" pitchFamily="34" charset="0"/>
                 <a:ea typeface="Consolas" pitchFamily="34" charset="-122"/>
@@ -8045,33 +8983,142 @@
         </p:nvSpPr>
         <p:spPr>
           <a:xfrm>
+            <a:off x="1298448" y="1316736"/>
+            <a:ext cx="1005840" cy="32004"/>
+          </a:xfrm>
+          <a:prstGeom prst="rect">
+            <a:avLst/>
+          </a:prstGeom>
+          <a:solidFill>
+            <a:srgbClr val="22D3EE"/>
+          </a:solidFill>
+          <a:ln/>
+        </p:spPr>
+      </p:sp>
+      <p:sp>
+        <p:nvSpPr>
+          <p:cNvPr id="7" name="Shape 5"/>
+          <p:cNvSpPr/>
+          <p:nvPr/>
+        </p:nvSpPr>
+        <p:spPr>
+          <a:xfrm>
             <a:off x="548640" y="1691640"/>
             <a:ext cx="8046720" cy="2468880"/>
           </a:xfrm>
-          <a:prstGeom prst="rect">
-            <a:avLst/>
-          </a:prstGeom>
-          <a:solidFill>
-            <a:srgbClr val="081320"/>
+          <a:prstGeom prst="roundRect">
+            <a:avLst>
+              <a:gd name="adj" fmla="val 1296"/>
+            </a:avLst>
+          </a:prstGeom>
+          <a:solidFill>
+            <a:srgbClr val="060F1A"/>
           </a:solidFill>
           <a:ln w="12700">
             <a:solidFill>
-              <a:srgbClr val="284963"/>
+              <a:srgbClr val="264862"/>
             </a:solidFill>
             <a:prstDash val="solid"/>
           </a:ln>
-        </p:spPr>
-      </p:sp>
-      <p:sp>
-        <p:nvSpPr>
-          <p:cNvPr id="7" name="Text 5"/>
-          <p:cNvSpPr/>
-          <p:nvPr/>
-        </p:nvSpPr>
-        <p:spPr>
-          <a:xfrm>
-            <a:off x="749808" y="1819656"/>
-            <a:ext cx="7644384" cy="2212848"/>
+          <a:effectLst>
+            <a:outerShdw sx="100000" sy="100000" kx="0" ky="0" algn="bl" rotWithShape="0" blurRad="88900" dist="38100" dir="5400000">
+              <a:srgbClr val="000000">
+                <a:alpha val="50000"/>
+              </a:srgbClr>
+            </a:outerShdw>
+          </a:effectLst>
+        </p:spPr>
+      </p:sp>
+      <p:sp>
+        <p:nvSpPr>
+          <p:cNvPr id="8" name="Shape 6"/>
+          <p:cNvSpPr/>
+          <p:nvPr/>
+        </p:nvSpPr>
+        <p:spPr>
+          <a:xfrm>
+            <a:off x="566928" y="1728216"/>
+            <a:ext cx="8010144" cy="274320"/>
+          </a:xfrm>
+          <a:prstGeom prst="rect">
+            <a:avLst/>
+          </a:prstGeom>
+          <a:solidFill>
+            <a:srgbClr val="13283C"/>
+          </a:solidFill>
+          <a:ln/>
+        </p:spPr>
+      </p:sp>
+      <p:sp>
+        <p:nvSpPr>
+          <p:cNvPr id="9" name="Shape 7"/>
+          <p:cNvSpPr/>
+          <p:nvPr/>
+        </p:nvSpPr>
+        <p:spPr>
+          <a:xfrm>
+            <a:off x="713232" y="1801368"/>
+            <a:ext cx="118872" cy="118872"/>
+          </a:xfrm>
+          <a:prstGeom prst="ellipse">
+            <a:avLst/>
+          </a:prstGeom>
+          <a:solidFill>
+            <a:srgbClr val="FB7185"/>
+          </a:solidFill>
+          <a:ln/>
+        </p:spPr>
+      </p:sp>
+      <p:sp>
+        <p:nvSpPr>
+          <p:cNvPr id="10" name="Shape 8"/>
+          <p:cNvSpPr/>
+          <p:nvPr/>
+        </p:nvSpPr>
+        <p:spPr>
+          <a:xfrm>
+            <a:off x="886968" y="1801368"/>
+            <a:ext cx="118872" cy="118872"/>
+          </a:xfrm>
+          <a:prstGeom prst="ellipse">
+            <a:avLst/>
+          </a:prstGeom>
+          <a:solidFill>
+            <a:srgbClr val="FBBF24"/>
+          </a:solidFill>
+          <a:ln/>
+        </p:spPr>
+      </p:sp>
+      <p:sp>
+        <p:nvSpPr>
+          <p:cNvPr id="11" name="Shape 9"/>
+          <p:cNvSpPr/>
+          <p:nvPr/>
+        </p:nvSpPr>
+        <p:spPr>
+          <a:xfrm>
+            <a:off x="1060704" y="1801368"/>
+            <a:ext cx="118872" cy="118872"/>
+          </a:xfrm>
+          <a:prstGeom prst="ellipse">
+            <a:avLst/>
+          </a:prstGeom>
+          <a:solidFill>
+            <a:srgbClr val="34D399"/>
+          </a:solidFill>
+          <a:ln/>
+        </p:spPr>
+      </p:sp>
+      <p:sp>
+        <p:nvSpPr>
+          <p:cNvPr id="12" name="Text 10"/>
+          <p:cNvSpPr/>
+          <p:nvPr/>
+        </p:nvSpPr>
+        <p:spPr>
+          <a:xfrm>
+            <a:off x="768096" y="2112264"/>
+            <a:ext cx="7626096" cy="1920240"/>
           </a:xfrm>
           <a:prstGeom prst="rect">
             <a:avLst/>
@@ -8089,7 +9136,7 @@
             <a:r>
               <a:rPr lang="en-US" sz="1350" dirty="0">
                 <a:solidFill>
-                  <a:srgbClr val="A8B4C4"/>
+                  <a:srgbClr val="9FB0C2"/>
                 </a:solidFill>
                 <a:latin typeface="Consolas" pitchFamily="34" charset="0"/>
                 <a:ea typeface="Consolas" pitchFamily="34" charset="-122"/>
@@ -8123,7 +9170,7 @@
             <a:r>
               <a:rPr lang="en-US" sz="1350" dirty="0">
                 <a:solidFill>
-                  <a:srgbClr val="A8B4C4"/>
+                  <a:srgbClr val="9FB0C2"/>
                 </a:solidFill>
                 <a:latin typeface="Consolas" pitchFamily="34" charset="0"/>
                 <a:ea typeface="Consolas" pitchFamily="34" charset="-122"/>
@@ -8157,7 +9204,7 @@
             <a:r>
               <a:rPr lang="en-US" sz="1350" dirty="0">
                 <a:solidFill>
-                  <a:srgbClr val="A8B4C4"/>
+                  <a:srgbClr val="9FB0C2"/>
                 </a:solidFill>
                 <a:latin typeface="Consolas" pitchFamily="34" charset="0"/>
                 <a:ea typeface="Consolas" pitchFamily="34" charset="-122"/>
@@ -8188,7 +9235,7 @@
       </p:sp>
       <p:sp>
         <p:nvSpPr>
-          <p:cNvPr id="8" name="Text 6"/>
+          <p:cNvPr id="13" name="Text 11"/>
           <p:cNvSpPr/>
           <p:nvPr/>
         </p:nvSpPr>
@@ -8217,7 +9264,7 @@
             <a:r>
               <a:rPr lang="en-US" sz="1400" dirty="0">
                 <a:solidFill>
-                  <a:srgbClr val="E8EEF5"/>
+                  <a:srgbClr val="EAF1F8"/>
                 </a:solidFill>
                 <a:latin typeface="Calibri" pitchFamily="34" charset="0"/>
                 <a:ea typeface="Calibri" pitchFamily="34" charset="-122"/>
